--- a/public/lessons/year-6-maths/summer/week-25/build-and-count-cubic-units/teaching-powerpoint-v1.pptx
+++ b/public/lessons/year-6-maths/summer/week-25/build-and-count-cubic-units/teaching-powerpoint-v1.pptx
@@ -2,24 +2,24 @@
 <file path=ppt/presentation.xml><?xml version="1.0" encoding="utf-8"?>
 <p:presentation xmlns:p="http://schemas.openxmlformats.org/presentationml/2006/main">
   <p:sldMasterIdLst>
-    <p:sldMasterId xmlns:r="http://schemas.openxmlformats.org/officeDocument/2006/relationships" id="2147483648" r:id="Rc90d5a9a63c24ee8"/>
+    <p:sldMasterId xmlns:r="http://schemas.openxmlformats.org/officeDocument/2006/relationships" id="2147483648" r:id="R4c8dbca9ce1a431a"/>
   </p:sldMasterIdLst>
   <p:notesMasterIdLst>
-    <p:notesMasterId xmlns:r="http://schemas.openxmlformats.org/officeDocument/2006/relationships" r:id="R1a27da90575549d4"/>
+    <p:notesMasterId xmlns:r="http://schemas.openxmlformats.org/officeDocument/2006/relationships" r:id="R645e869b70b0407c"/>
   </p:notesMasterIdLst>
   <p:sldIdLst>
-    <p:sldId xmlns:r="http://schemas.openxmlformats.org/officeDocument/2006/relationships" id="256" r:id="Rbe025d6fb54f44e9"/>
-    <p:sldId xmlns:r="http://schemas.openxmlformats.org/officeDocument/2006/relationships" id="257" r:id="Rbcb778260a874f7e"/>
-    <p:sldId xmlns:r="http://schemas.openxmlformats.org/officeDocument/2006/relationships" id="258" r:id="R8b679550fb684dce"/>
-    <p:sldId xmlns:r="http://schemas.openxmlformats.org/officeDocument/2006/relationships" id="259" r:id="R862d6f0d12dd493e"/>
-    <p:sldId xmlns:r="http://schemas.openxmlformats.org/officeDocument/2006/relationships" id="260" r:id="R8179e0f417c54081"/>
-    <p:sldId xmlns:r="http://schemas.openxmlformats.org/officeDocument/2006/relationships" id="261" r:id="Rdb42ec8644904a9c"/>
-    <p:sldId xmlns:r="http://schemas.openxmlformats.org/officeDocument/2006/relationships" id="262" r:id="R958aa5ea291144f0"/>
-    <p:sldId xmlns:r="http://schemas.openxmlformats.org/officeDocument/2006/relationships" id="263" r:id="R89eb770d75fd462d"/>
-    <p:sldId xmlns:r="http://schemas.openxmlformats.org/officeDocument/2006/relationships" id="264" r:id="R6e51073d70b64f02"/>
-    <p:sldId xmlns:r="http://schemas.openxmlformats.org/officeDocument/2006/relationships" id="265" r:id="Re446f73af4964401"/>
-    <p:sldId xmlns:r="http://schemas.openxmlformats.org/officeDocument/2006/relationships" id="266" r:id="R9211c908b24b476a"/>
-    <p:sldId xmlns:r="http://schemas.openxmlformats.org/officeDocument/2006/relationships" id="267" r:id="R9d63f42a10cd484f"/>
+    <p:sldId xmlns:r="http://schemas.openxmlformats.org/officeDocument/2006/relationships" id="256" r:id="R6c3276e70f9a4865"/>
+    <p:sldId xmlns:r="http://schemas.openxmlformats.org/officeDocument/2006/relationships" id="257" r:id="Ra561944fc8b04ee8"/>
+    <p:sldId xmlns:r="http://schemas.openxmlformats.org/officeDocument/2006/relationships" id="258" r:id="Rb5f7005afe5b4d89"/>
+    <p:sldId xmlns:r="http://schemas.openxmlformats.org/officeDocument/2006/relationships" id="259" r:id="Ra3b9a33f0192470e"/>
+    <p:sldId xmlns:r="http://schemas.openxmlformats.org/officeDocument/2006/relationships" id="260" r:id="R410fd67bd2374145"/>
+    <p:sldId xmlns:r="http://schemas.openxmlformats.org/officeDocument/2006/relationships" id="261" r:id="R8c347eb800b3495b"/>
+    <p:sldId xmlns:r="http://schemas.openxmlformats.org/officeDocument/2006/relationships" id="262" r:id="R46ff73efabdb46fb"/>
+    <p:sldId xmlns:r="http://schemas.openxmlformats.org/officeDocument/2006/relationships" id="263" r:id="Re9cc7eacecf7491e"/>
+    <p:sldId xmlns:r="http://schemas.openxmlformats.org/officeDocument/2006/relationships" id="264" r:id="Rb2d29ab792d64a0f"/>
+    <p:sldId xmlns:r="http://schemas.openxmlformats.org/officeDocument/2006/relationships" id="265" r:id="Rea101cb6cdf14f6f"/>
+    <p:sldId xmlns:r="http://schemas.openxmlformats.org/officeDocument/2006/relationships" id="266" r:id="Re906e7f495ba4180"/>
+    <p:sldId xmlns:r="http://schemas.openxmlformats.org/officeDocument/2006/relationships" id="267" r:id="Ra139225f355c4c26"/>
   </p:sldIdLst>
   <p:sldSz cx="12192000" cy="6858000"/>
   <p:notesSz cx="6858000" cy="9144000"/>
@@ -873,7 +873,7 @@
           <a:lstStyle xmlns:a="http://schemas.openxmlformats.org/drawingml/2006/main"/>
           <a:p xmlns:a="http://schemas.openxmlformats.org/drawingml/2006/main">
             <a:r>
-              <a:t>I do. Reveal the question, setup and each calculation stage one click at a time. Pupils watch before copying. Model answer: 120 cubic units.</a:t>
+              <a:t>I do. Reveal the question, then reveal each mathematical change one click at a time. Point to the numbers and operation that changed before moving to the next line. Final answer: 120 cubic units.</a:t>
             </a:r>
           </a:p>
         </p:txBody>
@@ -1291,7 +1291,7 @@
   </p:cSld>
   <p:clrMap bg1="lt1" tx1="dk1" bg2="lt2" tx2="dk2" accent1="accent1" accent2="accent2" accent3="accent3" accent4="accent4" accent5="accent5" accent6="accent6" hlink="hlink" folHlink="folHlink"/>
   <p:sldLayoutIdLst>
-    <p:sldLayoutId xmlns:r="http://schemas.openxmlformats.org/officeDocument/2006/relationships" id="2147483649" r:id="Rcc162505fff149fe"/>
+    <p:sldLayoutId xmlns:r="http://schemas.openxmlformats.org/officeDocument/2006/relationships" id="2147483649" r:id="Rb31956ecdb6342cb"/>
   </p:sldLayoutIdLst>
   <p:txStyles>
     <p:titleStyle>
@@ -1842,7 +1842,7 @@
           <p:cNvPr id="12" name="">
             <a:extLst xmlns:a="http://schemas.openxmlformats.org/drawingml/2006/main">
               <a:ext uri="{FF2B5EF4-FFF2-40B4-BE49-F238E27FC236}">
-                <a16:creationId xmlns:a16="http://schemas.microsoft.com/office/drawing/2014/main" id="{D3BFB586-2F28-4E36-B7B6-3560587F9BB4}"/>
+                <a16:creationId xmlns:a16="http://schemas.microsoft.com/office/drawing/2014/main" id="{9E78ABED-B27E-4DAD-948A-D06486A2A034}"/>
               </a:ext>
             </a:extLst>
           </p:cNvPr>
@@ -1874,7 +1874,7 @@
           <p:cNvPr id="2" name="">
             <a:extLst xmlns:a="http://schemas.openxmlformats.org/drawingml/2006/main">
               <a:ext uri="{FF2B5EF4-FFF2-40B4-BE49-F238E27FC236}">
-                <a16:creationId xmlns:a16="http://schemas.microsoft.com/office/drawing/2014/main" id="{1D42817D-A1D9-4B28-9DB5-552151D6D3EB}"/>
+                <a16:creationId xmlns:a16="http://schemas.microsoft.com/office/drawing/2014/main" id="{D8FAB7E6-CEAD-4714-9BB9-4215A45C4C1D}"/>
               </a:ext>
             </a:extLst>
           </p:cNvPr>
@@ -1931,7 +1931,7 @@
           <p:cNvPr id="3" name="">
             <a:extLst xmlns:a="http://schemas.openxmlformats.org/drawingml/2006/main">
               <a:ext uri="{FF2B5EF4-FFF2-40B4-BE49-F238E27FC236}">
-                <a16:creationId xmlns:a16="http://schemas.microsoft.com/office/drawing/2014/main" id="{CC03AFAD-D1DE-4B43-A292-6E74F7221B6F}"/>
+                <a16:creationId xmlns:a16="http://schemas.microsoft.com/office/drawing/2014/main" id="{32B8AC6B-614C-4EC6-B126-81DC6BB20F26}"/>
               </a:ext>
             </a:extLst>
           </p:cNvPr>
@@ -1965,7 +1965,7 @@
           <p:cNvPr id="4" name="">
             <a:extLst xmlns:a="http://schemas.openxmlformats.org/drawingml/2006/main">
               <a:ext uri="{FF2B5EF4-FFF2-40B4-BE49-F238E27FC236}">
-                <a16:creationId xmlns:a16="http://schemas.microsoft.com/office/drawing/2014/main" id="{A962A8F4-C804-43A8-97F5-9FDAF2E39634}"/>
+                <a16:creationId xmlns:a16="http://schemas.microsoft.com/office/drawing/2014/main" id="{E8DAF150-BBBA-4C10-9A97-8160BB169DB0}"/>
               </a:ext>
             </a:extLst>
           </p:cNvPr>
@@ -2022,7 +2022,7 @@
           <p:cNvPr id="5" name="">
             <a:extLst xmlns:a="http://schemas.openxmlformats.org/drawingml/2006/main">
               <a:ext uri="{FF2B5EF4-FFF2-40B4-BE49-F238E27FC236}">
-                <a16:creationId xmlns:a16="http://schemas.microsoft.com/office/drawing/2014/main" id="{90EEB6D4-2D82-449F-9138-0AD6823926C2}"/>
+                <a16:creationId xmlns:a16="http://schemas.microsoft.com/office/drawing/2014/main" id="{39C29FDC-9443-40D9-B009-78BDC5E69A84}"/>
               </a:ext>
             </a:extLst>
           </p:cNvPr>
@@ -2079,7 +2079,7 @@
           <p:cNvPr id="6" name="">
             <a:extLst xmlns:a="http://schemas.openxmlformats.org/drawingml/2006/main">
               <a:ext uri="{FF2B5EF4-FFF2-40B4-BE49-F238E27FC236}">
-                <a16:creationId xmlns:a16="http://schemas.microsoft.com/office/drawing/2014/main" id="{341E8FBF-E426-414F-9127-9F645129E3D4}"/>
+                <a16:creationId xmlns:a16="http://schemas.microsoft.com/office/drawing/2014/main" id="{370CAE95-4BF9-4BC6-B37C-B0C8B8CC8D6F}"/>
               </a:ext>
             </a:extLst>
           </p:cNvPr>
@@ -2113,7 +2113,7 @@
           <p:cNvPr id="7" name="">
             <a:extLst xmlns:a="http://schemas.openxmlformats.org/drawingml/2006/main">
               <a:ext uri="{FF2B5EF4-FFF2-40B4-BE49-F238E27FC236}">
-                <a16:creationId xmlns:a16="http://schemas.microsoft.com/office/drawing/2014/main" id="{C1119DD0-A4AA-47A0-BC64-10B4EFD437B8}"/>
+                <a16:creationId xmlns:a16="http://schemas.microsoft.com/office/drawing/2014/main" id="{CAA6EA76-1380-49C7-87F4-8EF66AD0F372}"/>
               </a:ext>
             </a:extLst>
           </p:cNvPr>
@@ -2170,7 +2170,7 @@
           <p:cNvPr id="8" name="">
             <a:extLst xmlns:a="http://schemas.openxmlformats.org/drawingml/2006/main">
               <a:ext uri="{FF2B5EF4-FFF2-40B4-BE49-F238E27FC236}">
-                <a16:creationId xmlns:a16="http://schemas.microsoft.com/office/drawing/2014/main" id="{C16CD521-6CCE-4D2B-A9B7-BDEF20BAEDA3}"/>
+                <a16:creationId xmlns:a16="http://schemas.microsoft.com/office/drawing/2014/main" id="{613285B7-F640-4778-BA96-2159130985EB}"/>
               </a:ext>
             </a:extLst>
           </p:cNvPr>
@@ -2227,7 +2227,7 @@
           <p:cNvPr id="9" name="">
             <a:extLst xmlns:a="http://schemas.openxmlformats.org/drawingml/2006/main">
               <a:ext uri="{FF2B5EF4-FFF2-40B4-BE49-F238E27FC236}">
-                <a16:creationId xmlns:a16="http://schemas.microsoft.com/office/drawing/2014/main" id="{8DE59AEA-560E-4A16-A74F-156DF10C44A1}"/>
+                <a16:creationId xmlns:a16="http://schemas.microsoft.com/office/drawing/2014/main" id="{025CA38D-1FDE-4EA9-80CC-E01694A74DAA}"/>
               </a:ext>
             </a:extLst>
           </p:cNvPr>
@@ -2284,7 +2284,7 @@
           <p:cNvPr id="10" name="">
             <a:extLst xmlns:a="http://schemas.openxmlformats.org/drawingml/2006/main">
               <a:ext uri="{FF2B5EF4-FFF2-40B4-BE49-F238E27FC236}">
-                <a16:creationId xmlns:a16="http://schemas.microsoft.com/office/drawing/2014/main" id="{3DA07341-261A-4732-B6DB-79A886E32D8B}"/>
+                <a16:creationId xmlns:a16="http://schemas.microsoft.com/office/drawing/2014/main" id="{E21ADE7A-AF78-4015-B121-F5B09C0811BA}"/>
               </a:ext>
             </a:extLst>
           </p:cNvPr>
@@ -2341,7 +2341,7 @@
           <p:cNvPr id="11" name="">
             <a:extLst xmlns:a="http://schemas.openxmlformats.org/drawingml/2006/main">
               <a:ext uri="{FF2B5EF4-FFF2-40B4-BE49-F238E27FC236}">
-                <a16:creationId xmlns:a16="http://schemas.microsoft.com/office/drawing/2014/main" id="{981578CA-DEFA-4CFD-A6DD-134048C762DA}"/>
+                <a16:creationId xmlns:a16="http://schemas.microsoft.com/office/drawing/2014/main" id="{377C5D3E-4332-4CD3-BD7D-1270125E5DE1}"/>
               </a:ext>
             </a:extLst>
           </p:cNvPr>
@@ -2396,7 +2396,7 @@
     </p:spTree>
     <p:extLst>
       <p:ext uri="{BB962C8B-B14F-4D97-AF65-F5344CB8AC3E}">
-        <p14:creationId xmlns:p14="http://schemas.microsoft.com/office/powerpoint/2010/main" val="433358341"/>
+        <p14:creationId xmlns:p14="http://schemas.microsoft.com/office/powerpoint/2010/main" val="1338815922"/>
       </p:ext>
     </p:extLst>
   </p:cSld>
@@ -2427,7 +2427,7 @@
           <p:cNvPr id="14" name="">
             <a:extLst xmlns:a="http://schemas.openxmlformats.org/drawingml/2006/main">
               <a:ext uri="{FF2B5EF4-FFF2-40B4-BE49-F238E27FC236}">
-                <a16:creationId xmlns:a16="http://schemas.microsoft.com/office/drawing/2014/main" id="{2E207F63-05A0-458F-AD0C-92C8A4E233C3}"/>
+                <a16:creationId xmlns:a16="http://schemas.microsoft.com/office/drawing/2014/main" id="{8A9A95DB-42B5-4A5D-AE33-B8759E26B55C}"/>
               </a:ext>
             </a:extLst>
           </p:cNvPr>
@@ -2459,7 +2459,7 @@
           <p:cNvPr id="2" name="">
             <a:extLst xmlns:a="http://schemas.openxmlformats.org/drawingml/2006/main">
               <a:ext uri="{FF2B5EF4-FFF2-40B4-BE49-F238E27FC236}">
-                <a16:creationId xmlns:a16="http://schemas.microsoft.com/office/drawing/2014/main" id="{E336DC5F-6DEE-4D08-881E-EA64A20F54DD}"/>
+                <a16:creationId xmlns:a16="http://schemas.microsoft.com/office/drawing/2014/main" id="{1127CF03-8EF6-4EB9-9C6B-C6EA6837BACB}"/>
               </a:ext>
             </a:extLst>
           </p:cNvPr>
@@ -2516,7 +2516,7 @@
           <p:cNvPr id="3" name="">
             <a:extLst xmlns:a="http://schemas.openxmlformats.org/drawingml/2006/main">
               <a:ext uri="{FF2B5EF4-FFF2-40B4-BE49-F238E27FC236}">
-                <a16:creationId xmlns:a16="http://schemas.microsoft.com/office/drawing/2014/main" id="{C16DC76A-4A2D-4BA2-8382-2AF4A9B6EBD9}"/>
+                <a16:creationId xmlns:a16="http://schemas.microsoft.com/office/drawing/2014/main" id="{62CD051D-204B-43AF-A573-9430CD104D5D}"/>
               </a:ext>
             </a:extLst>
           </p:cNvPr>
@@ -2548,7 +2548,7 @@
           <p:cNvPr id="4" name="">
             <a:extLst xmlns:a="http://schemas.openxmlformats.org/drawingml/2006/main">
               <a:ext uri="{FF2B5EF4-FFF2-40B4-BE49-F238E27FC236}">
-                <a16:creationId xmlns:a16="http://schemas.microsoft.com/office/drawing/2014/main" id="{FB98F4EE-ED5B-4557-8B35-4985ECDFA983}"/>
+                <a16:creationId xmlns:a16="http://schemas.microsoft.com/office/drawing/2014/main" id="{D30CA77C-BAAF-4EC1-92EC-98D6545AAD80}"/>
               </a:ext>
             </a:extLst>
           </p:cNvPr>
@@ -2605,7 +2605,7 @@
           <p:cNvPr id="5" name="">
             <a:extLst xmlns:a="http://schemas.openxmlformats.org/drawingml/2006/main">
               <a:ext uri="{FF2B5EF4-FFF2-40B4-BE49-F238E27FC236}">
-                <a16:creationId xmlns:a16="http://schemas.microsoft.com/office/drawing/2014/main" id="{4409E99C-0B0A-4B3B-A26A-5DE5F5816438}"/>
+                <a16:creationId xmlns:a16="http://schemas.microsoft.com/office/drawing/2014/main" id="{DF9041B9-ACBA-4DCE-89DF-3441F68F6055}"/>
               </a:ext>
             </a:extLst>
           </p:cNvPr>
@@ -2662,7 +2662,7 @@
           <p:cNvPr id="6" name="">
             <a:extLst xmlns:a="http://schemas.openxmlformats.org/drawingml/2006/main">
               <a:ext uri="{FF2B5EF4-FFF2-40B4-BE49-F238E27FC236}">
-                <a16:creationId xmlns:a16="http://schemas.microsoft.com/office/drawing/2014/main" id="{74815340-57D3-47C4-B2A8-4A1218898171}"/>
+                <a16:creationId xmlns:a16="http://schemas.microsoft.com/office/drawing/2014/main" id="{E0860550-D36D-4039-9BB2-E0F7B1AB022D}"/>
               </a:ext>
             </a:extLst>
           </p:cNvPr>
@@ -2719,7 +2719,7 @@
           <p:cNvPr id="7" name="">
             <a:extLst xmlns:a="http://schemas.openxmlformats.org/drawingml/2006/main">
               <a:ext uri="{FF2B5EF4-FFF2-40B4-BE49-F238E27FC236}">
-                <a16:creationId xmlns:a16="http://schemas.microsoft.com/office/drawing/2014/main" id="{B72DBA19-D110-4B7C-88B6-9F933EAB9506}"/>
+                <a16:creationId xmlns:a16="http://schemas.microsoft.com/office/drawing/2014/main" id="{34C8DA85-9D81-437E-BD49-03868D678BB0}"/>
               </a:ext>
             </a:extLst>
           </p:cNvPr>
@@ -2751,7 +2751,7 @@
           <p:cNvPr id="8" name="">
             <a:extLst xmlns:a="http://schemas.openxmlformats.org/drawingml/2006/main">
               <a:ext uri="{FF2B5EF4-FFF2-40B4-BE49-F238E27FC236}">
-                <a16:creationId xmlns:a16="http://schemas.microsoft.com/office/drawing/2014/main" id="{0D8F2F90-7547-4A97-9CC5-87F2CB212719}"/>
+                <a16:creationId xmlns:a16="http://schemas.microsoft.com/office/drawing/2014/main" id="{31CEB3F8-3613-4971-A7B7-90573BB88A01}"/>
               </a:ext>
             </a:extLst>
           </p:cNvPr>
@@ -2808,7 +2808,7 @@
           <p:cNvPr id="9" name="">
             <a:extLst xmlns:a="http://schemas.openxmlformats.org/drawingml/2006/main">
               <a:ext uri="{FF2B5EF4-FFF2-40B4-BE49-F238E27FC236}">
-                <a16:creationId xmlns:a16="http://schemas.microsoft.com/office/drawing/2014/main" id="{4112598D-CC4E-41F4-9A1E-E8E40BE6AE57}"/>
+                <a16:creationId xmlns:a16="http://schemas.microsoft.com/office/drawing/2014/main" id="{B3D94A74-1CA8-47AD-A180-E2C7D8740A32}"/>
               </a:ext>
             </a:extLst>
           </p:cNvPr>
@@ -2865,7 +2865,7 @@
           <p:cNvPr id="10" name="">
             <a:extLst xmlns:a="http://schemas.openxmlformats.org/drawingml/2006/main">
               <a:ext uri="{FF2B5EF4-FFF2-40B4-BE49-F238E27FC236}">
-                <a16:creationId xmlns:a16="http://schemas.microsoft.com/office/drawing/2014/main" id="{E2D33D6A-9D80-431D-911E-C4AF132826BC}"/>
+                <a16:creationId xmlns:a16="http://schemas.microsoft.com/office/drawing/2014/main" id="{A8EAE519-57BF-42EB-86CB-9B3C86D6A177}"/>
               </a:ext>
             </a:extLst>
           </p:cNvPr>
@@ -2922,7 +2922,7 @@
           <p:cNvPr id="11" name="">
             <a:extLst xmlns:a="http://schemas.openxmlformats.org/drawingml/2006/main">
               <a:ext uri="{FF2B5EF4-FFF2-40B4-BE49-F238E27FC236}">
-                <a16:creationId xmlns:a16="http://schemas.microsoft.com/office/drawing/2014/main" id="{032EC989-2E29-4976-8D5D-A7996304819F}"/>
+                <a16:creationId xmlns:a16="http://schemas.microsoft.com/office/drawing/2014/main" id="{E1DC16C1-E064-4D31-876A-5750DD6DE474}"/>
               </a:ext>
             </a:extLst>
           </p:cNvPr>
@@ -2979,7 +2979,7 @@
           <p:cNvPr id="12" name="">
             <a:extLst xmlns:a="http://schemas.openxmlformats.org/drawingml/2006/main">
               <a:ext uri="{FF2B5EF4-FFF2-40B4-BE49-F238E27FC236}">
-                <a16:creationId xmlns:a16="http://schemas.microsoft.com/office/drawing/2014/main" id="{6762E59E-99A3-41A7-973D-4FA0B5C7A6B8}"/>
+                <a16:creationId xmlns:a16="http://schemas.microsoft.com/office/drawing/2014/main" id="{C46D5A99-219F-4950-9A41-C8CC8E2DF310}"/>
               </a:ext>
             </a:extLst>
           </p:cNvPr>
@@ -3036,7 +3036,7 @@
           <p:cNvPr id="13" name="">
             <a:extLst xmlns:a="http://schemas.openxmlformats.org/drawingml/2006/main">
               <a:ext uri="{FF2B5EF4-FFF2-40B4-BE49-F238E27FC236}">
-                <a16:creationId xmlns:a16="http://schemas.microsoft.com/office/drawing/2014/main" id="{BA573564-3DB0-420B-A112-B45EEEF06183}"/>
+                <a16:creationId xmlns:a16="http://schemas.microsoft.com/office/drawing/2014/main" id="{353B32E4-2B21-48C8-90D7-216397A32853}"/>
               </a:ext>
             </a:extLst>
           </p:cNvPr>
@@ -3091,7 +3091,7 @@
     </p:spTree>
     <p:extLst>
       <p:ext uri="{BB962C8B-B14F-4D97-AF65-F5344CB8AC3E}">
-        <p14:creationId xmlns:p14="http://schemas.microsoft.com/office/powerpoint/2010/main" val="1579031746"/>
+        <p14:creationId xmlns:p14="http://schemas.microsoft.com/office/powerpoint/2010/main" val="1955940527"/>
       </p:ext>
     </p:extLst>
   </p:cSld>
@@ -3292,7 +3292,7 @@
           <p:cNvPr id="19" name="">
             <a:extLst xmlns:a="http://schemas.openxmlformats.org/drawingml/2006/main">
               <a:ext uri="{FF2B5EF4-FFF2-40B4-BE49-F238E27FC236}">
-                <a16:creationId xmlns:a16="http://schemas.microsoft.com/office/drawing/2014/main" id="{C7EE69F7-DB81-4F6D-86DB-041172DCCD37}"/>
+                <a16:creationId xmlns:a16="http://schemas.microsoft.com/office/drawing/2014/main" id="{F3847D59-A02D-4F46-90E4-56D23AC34B06}"/>
               </a:ext>
             </a:extLst>
           </p:cNvPr>
@@ -3324,7 +3324,7 @@
           <p:cNvPr id="2" name="">
             <a:extLst xmlns:a="http://schemas.openxmlformats.org/drawingml/2006/main">
               <a:ext uri="{FF2B5EF4-FFF2-40B4-BE49-F238E27FC236}">
-                <a16:creationId xmlns:a16="http://schemas.microsoft.com/office/drawing/2014/main" id="{6F5CF74F-5902-432C-B43E-12A9086B5A52}"/>
+                <a16:creationId xmlns:a16="http://schemas.microsoft.com/office/drawing/2014/main" id="{A9C297BF-AE11-45CB-BC91-7E9037DE5D26}"/>
               </a:ext>
             </a:extLst>
           </p:cNvPr>
@@ -3381,7 +3381,7 @@
           <p:cNvPr id="3" name="">
             <a:extLst xmlns:a="http://schemas.openxmlformats.org/drawingml/2006/main">
               <a:ext uri="{FF2B5EF4-FFF2-40B4-BE49-F238E27FC236}">
-                <a16:creationId xmlns:a16="http://schemas.microsoft.com/office/drawing/2014/main" id="{0C44FB43-8956-4059-9844-EA12874C68BD}"/>
+                <a16:creationId xmlns:a16="http://schemas.microsoft.com/office/drawing/2014/main" id="{C728BE07-1DEE-405D-82DC-50D683B447C7}"/>
               </a:ext>
             </a:extLst>
           </p:cNvPr>
@@ -3413,7 +3413,7 @@
           <p:cNvPr id="4" name="">
             <a:extLst xmlns:a="http://schemas.openxmlformats.org/drawingml/2006/main">
               <a:ext uri="{FF2B5EF4-FFF2-40B4-BE49-F238E27FC236}">
-                <a16:creationId xmlns:a16="http://schemas.microsoft.com/office/drawing/2014/main" id="{5B6FBB16-C78D-40EF-A732-21BC2091B52C}"/>
+                <a16:creationId xmlns:a16="http://schemas.microsoft.com/office/drawing/2014/main" id="{9F4BA484-1D95-4DBB-99DF-DD9337783620}"/>
               </a:ext>
             </a:extLst>
           </p:cNvPr>
@@ -3470,7 +3470,7 @@
           <p:cNvPr id="5" name="">
             <a:extLst xmlns:a="http://schemas.openxmlformats.org/drawingml/2006/main">
               <a:ext uri="{FF2B5EF4-FFF2-40B4-BE49-F238E27FC236}">
-                <a16:creationId xmlns:a16="http://schemas.microsoft.com/office/drawing/2014/main" id="{ED63AA51-EB35-4DE0-BC46-078E959D8AE9}"/>
+                <a16:creationId xmlns:a16="http://schemas.microsoft.com/office/drawing/2014/main" id="{0350C25D-9646-428A-9DE1-B2A392C3D256}"/>
               </a:ext>
             </a:extLst>
           </p:cNvPr>
@@ -3527,7 +3527,7 @@
           <p:cNvPr id="6" name="">
             <a:extLst xmlns:a="http://schemas.openxmlformats.org/drawingml/2006/main">
               <a:ext uri="{FF2B5EF4-FFF2-40B4-BE49-F238E27FC236}">
-                <a16:creationId xmlns:a16="http://schemas.microsoft.com/office/drawing/2014/main" id="{C5B33B8B-9036-470B-B181-F032FC2C0B64}"/>
+                <a16:creationId xmlns:a16="http://schemas.microsoft.com/office/drawing/2014/main" id="{00E9CEA2-7C7F-4B39-8038-4974F48A3B51}"/>
               </a:ext>
             </a:extLst>
           </p:cNvPr>
@@ -3584,7 +3584,7 @@
           <p:cNvPr id="7" name="">
             <a:extLst xmlns:a="http://schemas.openxmlformats.org/drawingml/2006/main">
               <a:ext uri="{FF2B5EF4-FFF2-40B4-BE49-F238E27FC236}">
-                <a16:creationId xmlns:a16="http://schemas.microsoft.com/office/drawing/2014/main" id="{9283990D-3308-464E-94C5-26E0CC321038}"/>
+                <a16:creationId xmlns:a16="http://schemas.microsoft.com/office/drawing/2014/main" id="{EAA04D12-B66B-479D-B489-FF5616FF9C80}"/>
               </a:ext>
             </a:extLst>
           </p:cNvPr>
@@ -3616,7 +3616,7 @@
           <p:cNvPr id="8" name="">
             <a:extLst xmlns:a="http://schemas.openxmlformats.org/drawingml/2006/main">
               <a:ext uri="{FF2B5EF4-FFF2-40B4-BE49-F238E27FC236}">
-                <a16:creationId xmlns:a16="http://schemas.microsoft.com/office/drawing/2014/main" id="{1E1AB073-901E-4FD2-B264-31D13DFFC69E}"/>
+                <a16:creationId xmlns:a16="http://schemas.microsoft.com/office/drawing/2014/main" id="{0E4C8079-2AED-450F-9654-9ECA059D0C31}"/>
               </a:ext>
             </a:extLst>
           </p:cNvPr>
@@ -3673,7 +3673,7 @@
           <p:cNvPr id="9" name="">
             <a:extLst xmlns:a="http://schemas.openxmlformats.org/drawingml/2006/main">
               <a:ext uri="{FF2B5EF4-FFF2-40B4-BE49-F238E27FC236}">
-                <a16:creationId xmlns:a16="http://schemas.microsoft.com/office/drawing/2014/main" id="{93C181B9-CEB6-498E-8B89-0D7A3591347D}"/>
+                <a16:creationId xmlns:a16="http://schemas.microsoft.com/office/drawing/2014/main" id="{85924353-9545-47EE-95BA-10021221E4CE}"/>
               </a:ext>
             </a:extLst>
           </p:cNvPr>
@@ -3730,7 +3730,7 @@
           <p:cNvPr id="10" name="">
             <a:extLst xmlns:a="http://schemas.openxmlformats.org/drawingml/2006/main">
               <a:ext uri="{FF2B5EF4-FFF2-40B4-BE49-F238E27FC236}">
-                <a16:creationId xmlns:a16="http://schemas.microsoft.com/office/drawing/2014/main" id="{4F77F60B-2A48-47E4-B685-48E6AE4952ED}"/>
+                <a16:creationId xmlns:a16="http://schemas.microsoft.com/office/drawing/2014/main" id="{FB64DF8A-CF3E-4A87-B519-14F053582D15}"/>
               </a:ext>
             </a:extLst>
           </p:cNvPr>
@@ -3787,7 +3787,7 @@
           <p:cNvPr id="11" name="">
             <a:extLst xmlns:a="http://schemas.openxmlformats.org/drawingml/2006/main">
               <a:ext uri="{FF2B5EF4-FFF2-40B4-BE49-F238E27FC236}">
-                <a16:creationId xmlns:a16="http://schemas.microsoft.com/office/drawing/2014/main" id="{D722354B-B96F-4CB2-8D44-AC51DA56F97C}"/>
+                <a16:creationId xmlns:a16="http://schemas.microsoft.com/office/drawing/2014/main" id="{7C8E3E66-F651-4E91-BBC1-67750398958C}"/>
               </a:ext>
             </a:extLst>
           </p:cNvPr>
@@ -3821,7 +3821,7 @@
           <p:cNvPr id="12" name="">
             <a:extLst xmlns:a="http://schemas.openxmlformats.org/drawingml/2006/main">
               <a:ext uri="{FF2B5EF4-FFF2-40B4-BE49-F238E27FC236}">
-                <a16:creationId xmlns:a16="http://schemas.microsoft.com/office/drawing/2014/main" id="{995AF9F3-5BFD-4381-A708-5FCD56F26AFF}"/>
+                <a16:creationId xmlns:a16="http://schemas.microsoft.com/office/drawing/2014/main" id="{B1E2B4AE-D69B-4CCC-BA2F-4E5DBD6D0A15}"/>
               </a:ext>
             </a:extLst>
           </p:cNvPr>
@@ -3878,7 +3878,7 @@
           <p:cNvPr id="13" name="">
             <a:extLst xmlns:a="http://schemas.openxmlformats.org/drawingml/2006/main">
               <a:ext uri="{FF2B5EF4-FFF2-40B4-BE49-F238E27FC236}">
-                <a16:creationId xmlns:a16="http://schemas.microsoft.com/office/drawing/2014/main" id="{83C87A7D-C442-43AF-B2BE-389FC18745B4}"/>
+                <a16:creationId xmlns:a16="http://schemas.microsoft.com/office/drawing/2014/main" id="{63DA1469-3088-46F1-946E-44F5F906C3CA}"/>
               </a:ext>
             </a:extLst>
           </p:cNvPr>
@@ -3935,7 +3935,7 @@
           <p:cNvPr id="14" name="">
             <a:extLst xmlns:a="http://schemas.openxmlformats.org/drawingml/2006/main">
               <a:ext uri="{FF2B5EF4-FFF2-40B4-BE49-F238E27FC236}">
-                <a16:creationId xmlns:a16="http://schemas.microsoft.com/office/drawing/2014/main" id="{6455FB33-EA9B-4151-B335-71B4F9941299}"/>
+                <a16:creationId xmlns:a16="http://schemas.microsoft.com/office/drawing/2014/main" id="{242ED3A4-762D-497C-B1BA-C614EE9A6378}"/>
               </a:ext>
             </a:extLst>
           </p:cNvPr>
@@ -3992,7 +3992,7 @@
           <p:cNvPr id="15" name="">
             <a:extLst xmlns:a="http://schemas.openxmlformats.org/drawingml/2006/main">
               <a:ext uri="{FF2B5EF4-FFF2-40B4-BE49-F238E27FC236}">
-                <a16:creationId xmlns:a16="http://schemas.microsoft.com/office/drawing/2014/main" id="{1206103F-3E20-49D1-AF66-AEFC256783B6}"/>
+                <a16:creationId xmlns:a16="http://schemas.microsoft.com/office/drawing/2014/main" id="{ACA6FBC1-1AD7-4D67-A7A8-F2EE7B83E6A6}"/>
               </a:ext>
             </a:extLst>
           </p:cNvPr>
@@ -4026,7 +4026,7 @@
           <p:cNvPr id="16" name="">
             <a:extLst xmlns:a="http://schemas.openxmlformats.org/drawingml/2006/main">
               <a:ext uri="{FF2B5EF4-FFF2-40B4-BE49-F238E27FC236}">
-                <a16:creationId xmlns:a16="http://schemas.microsoft.com/office/drawing/2014/main" id="{EC099819-C8FC-44E9-AAF0-ECDD22B0E9DC}"/>
+                <a16:creationId xmlns:a16="http://schemas.microsoft.com/office/drawing/2014/main" id="{3BB285AE-6FAA-430D-9838-07909BE96D83}"/>
               </a:ext>
             </a:extLst>
           </p:cNvPr>
@@ -4083,7 +4083,7 @@
           <p:cNvPr id="17" name="">
             <a:extLst xmlns:a="http://schemas.openxmlformats.org/drawingml/2006/main">
               <a:ext uri="{FF2B5EF4-FFF2-40B4-BE49-F238E27FC236}">
-                <a16:creationId xmlns:a16="http://schemas.microsoft.com/office/drawing/2014/main" id="{1D2B298E-0D1A-459B-943A-A3669792B30D}"/>
+                <a16:creationId xmlns:a16="http://schemas.microsoft.com/office/drawing/2014/main" id="{693B9D43-F001-481D-9150-5E9E7586AB6C}"/>
               </a:ext>
             </a:extLst>
           </p:cNvPr>
@@ -4140,7 +4140,7 @@
           <p:cNvPr id="18" name="">
             <a:extLst xmlns:a="http://schemas.openxmlformats.org/drawingml/2006/main">
               <a:ext uri="{FF2B5EF4-FFF2-40B4-BE49-F238E27FC236}">
-                <a16:creationId xmlns:a16="http://schemas.microsoft.com/office/drawing/2014/main" id="{43EB66A9-CDAC-48E1-9437-4FE6247D24F2}"/>
+                <a16:creationId xmlns:a16="http://schemas.microsoft.com/office/drawing/2014/main" id="{2B239098-DC0A-467F-9D9A-5D1CA92F670D}"/>
               </a:ext>
             </a:extLst>
           </p:cNvPr>
@@ -4195,7 +4195,7 @@
     </p:spTree>
     <p:extLst>
       <p:ext uri="{BB962C8B-B14F-4D97-AF65-F5344CB8AC3E}">
-        <p14:creationId xmlns:p14="http://schemas.microsoft.com/office/powerpoint/2010/main" val="418303663"/>
+        <p14:creationId xmlns:p14="http://schemas.microsoft.com/office/powerpoint/2010/main" val="968577984"/>
       </p:ext>
     </p:extLst>
   </p:cSld>
@@ -4350,7 +4350,7 @@
           <p:cNvPr id="23" name="">
             <a:extLst xmlns:a="http://schemas.openxmlformats.org/drawingml/2006/main">
               <a:ext uri="{FF2B5EF4-FFF2-40B4-BE49-F238E27FC236}">
-                <a16:creationId xmlns:a16="http://schemas.microsoft.com/office/drawing/2014/main" id="{74BF79BC-91C8-4E45-9029-14209B932D51}"/>
+                <a16:creationId xmlns:a16="http://schemas.microsoft.com/office/drawing/2014/main" id="{04B0C49A-D972-4784-B69A-372B50E47F34}"/>
               </a:ext>
             </a:extLst>
           </p:cNvPr>
@@ -4382,7 +4382,7 @@
           <p:cNvPr id="2" name="">
             <a:extLst xmlns:a="http://schemas.openxmlformats.org/drawingml/2006/main">
               <a:ext uri="{FF2B5EF4-FFF2-40B4-BE49-F238E27FC236}">
-                <a16:creationId xmlns:a16="http://schemas.microsoft.com/office/drawing/2014/main" id="{9CD811AB-0F75-4B70-AB7C-BD864E3908B1}"/>
+                <a16:creationId xmlns:a16="http://schemas.microsoft.com/office/drawing/2014/main" id="{79EAC687-7736-4B67-8CF7-54D263148A02}"/>
               </a:ext>
             </a:extLst>
           </p:cNvPr>
@@ -4439,7 +4439,7 @@
           <p:cNvPr id="3" name="">
             <a:extLst xmlns:a="http://schemas.openxmlformats.org/drawingml/2006/main">
               <a:ext uri="{FF2B5EF4-FFF2-40B4-BE49-F238E27FC236}">
-                <a16:creationId xmlns:a16="http://schemas.microsoft.com/office/drawing/2014/main" id="{BD95DF70-696B-49A1-9E61-B1984EA82185}"/>
+                <a16:creationId xmlns:a16="http://schemas.microsoft.com/office/drawing/2014/main" id="{C926520D-0E26-4A2E-B8B5-9750520669C5}"/>
               </a:ext>
             </a:extLst>
           </p:cNvPr>
@@ -4471,7 +4471,7 @@
           <p:cNvPr id="4" name="">
             <a:extLst xmlns:a="http://schemas.openxmlformats.org/drawingml/2006/main">
               <a:ext uri="{FF2B5EF4-FFF2-40B4-BE49-F238E27FC236}">
-                <a16:creationId xmlns:a16="http://schemas.microsoft.com/office/drawing/2014/main" id="{B1DD8A7D-6E17-4FBE-8AD1-267E3D51D127}"/>
+                <a16:creationId xmlns:a16="http://schemas.microsoft.com/office/drawing/2014/main" id="{D102DE15-62A0-4157-8A8A-664F2288F3E5}"/>
               </a:ext>
             </a:extLst>
           </p:cNvPr>
@@ -4528,7 +4528,7 @@
           <p:cNvPr id="5" name="">
             <a:extLst xmlns:a="http://schemas.openxmlformats.org/drawingml/2006/main">
               <a:ext uri="{FF2B5EF4-FFF2-40B4-BE49-F238E27FC236}">
-                <a16:creationId xmlns:a16="http://schemas.microsoft.com/office/drawing/2014/main" id="{21A754B4-8F9B-46A8-A805-D88E6E561102}"/>
+                <a16:creationId xmlns:a16="http://schemas.microsoft.com/office/drawing/2014/main" id="{4C08BCA1-AD6B-40E0-B6FD-9DBECF70981F}"/>
               </a:ext>
             </a:extLst>
           </p:cNvPr>
@@ -4585,7 +4585,7 @@
           <p:cNvPr id="6" name="">
             <a:extLst xmlns:a="http://schemas.openxmlformats.org/drawingml/2006/main">
               <a:ext uri="{FF2B5EF4-FFF2-40B4-BE49-F238E27FC236}">
-                <a16:creationId xmlns:a16="http://schemas.microsoft.com/office/drawing/2014/main" id="{144003BA-6A6C-4C74-A5CC-962D0B473EF7}"/>
+                <a16:creationId xmlns:a16="http://schemas.microsoft.com/office/drawing/2014/main" id="{6E4D029E-BAC1-47E4-87CA-C49AF53F2AD8}"/>
               </a:ext>
             </a:extLst>
           </p:cNvPr>
@@ -4642,7 +4642,7 @@
           <p:cNvPr id="7" name="">
             <a:extLst xmlns:a="http://schemas.openxmlformats.org/drawingml/2006/main">
               <a:ext uri="{FF2B5EF4-FFF2-40B4-BE49-F238E27FC236}">
-                <a16:creationId xmlns:a16="http://schemas.microsoft.com/office/drawing/2014/main" id="{BEB82888-43B2-44C1-932F-50578D2B1723}"/>
+                <a16:creationId xmlns:a16="http://schemas.microsoft.com/office/drawing/2014/main" id="{7231E51C-D751-486A-965C-D428A46A873F}"/>
               </a:ext>
             </a:extLst>
           </p:cNvPr>
@@ -4674,7 +4674,7 @@
           <p:cNvPr id="8" name="">
             <a:extLst xmlns:a="http://schemas.openxmlformats.org/drawingml/2006/main">
               <a:ext uri="{FF2B5EF4-FFF2-40B4-BE49-F238E27FC236}">
-                <a16:creationId xmlns:a16="http://schemas.microsoft.com/office/drawing/2014/main" id="{39CE2169-F554-4223-890A-D7F25F765B1C}"/>
+                <a16:creationId xmlns:a16="http://schemas.microsoft.com/office/drawing/2014/main" id="{509B9BE9-1D2B-461A-9F54-DF91CE319F59}"/>
               </a:ext>
             </a:extLst>
           </p:cNvPr>
@@ -4731,7 +4731,7 @@
           <p:cNvPr id="9" name="">
             <a:extLst xmlns:a="http://schemas.openxmlformats.org/drawingml/2006/main">
               <a:ext uri="{FF2B5EF4-FFF2-40B4-BE49-F238E27FC236}">
-                <a16:creationId xmlns:a16="http://schemas.microsoft.com/office/drawing/2014/main" id="{45F63744-DDA7-48FC-94BD-3C33AD33B6B6}"/>
+                <a16:creationId xmlns:a16="http://schemas.microsoft.com/office/drawing/2014/main" id="{038EBC02-629F-49E7-85C1-1F70612352CC}"/>
               </a:ext>
             </a:extLst>
           </p:cNvPr>
@@ -4788,7 +4788,7 @@
           <p:cNvPr id="10" name="">
             <a:extLst xmlns:a="http://schemas.openxmlformats.org/drawingml/2006/main">
               <a:ext uri="{FF2B5EF4-FFF2-40B4-BE49-F238E27FC236}">
-                <a16:creationId xmlns:a16="http://schemas.microsoft.com/office/drawing/2014/main" id="{968A5357-425A-4DFE-89AA-84D4F66F0DB6}"/>
+                <a16:creationId xmlns:a16="http://schemas.microsoft.com/office/drawing/2014/main" id="{EEB79D8E-3224-4360-ADDF-FEF5261D3B94}"/>
               </a:ext>
             </a:extLst>
           </p:cNvPr>
@@ -4822,7 +4822,7 @@
           <p:cNvPr id="11" name="">
             <a:extLst xmlns:a="http://schemas.openxmlformats.org/drawingml/2006/main">
               <a:ext uri="{FF2B5EF4-FFF2-40B4-BE49-F238E27FC236}">
-                <a16:creationId xmlns:a16="http://schemas.microsoft.com/office/drawing/2014/main" id="{ABAD8BB3-4690-40D6-B1F1-843051AEB917}"/>
+                <a16:creationId xmlns:a16="http://schemas.microsoft.com/office/drawing/2014/main" id="{FA01CB78-8DC7-4858-A376-EEFA37E64FBB}"/>
               </a:ext>
             </a:extLst>
           </p:cNvPr>
@@ -4854,7 +4854,7 @@
           <p:cNvPr id="12" name="">
             <a:extLst xmlns:a="http://schemas.openxmlformats.org/drawingml/2006/main">
               <a:ext uri="{FF2B5EF4-FFF2-40B4-BE49-F238E27FC236}">
-                <a16:creationId xmlns:a16="http://schemas.microsoft.com/office/drawing/2014/main" id="{F7DDA6E7-BC2A-46B9-80B2-4FF52A6717BF}"/>
+                <a16:creationId xmlns:a16="http://schemas.microsoft.com/office/drawing/2014/main" id="{906E052A-F498-4177-BE9E-6F551A3A5E24}"/>
               </a:ext>
             </a:extLst>
           </p:cNvPr>
@@ -4911,7 +4911,7 @@
           <p:cNvPr id="13" name="">
             <a:extLst xmlns:a="http://schemas.openxmlformats.org/drawingml/2006/main">
               <a:ext uri="{FF2B5EF4-FFF2-40B4-BE49-F238E27FC236}">
-                <a16:creationId xmlns:a16="http://schemas.microsoft.com/office/drawing/2014/main" id="{F2CC2B62-F936-498F-B477-AD9B7F583205}"/>
+                <a16:creationId xmlns:a16="http://schemas.microsoft.com/office/drawing/2014/main" id="{94AD8144-2E23-4871-BC43-3583DBEC4B8E}"/>
               </a:ext>
             </a:extLst>
           </p:cNvPr>
@@ -4968,7 +4968,7 @@
           <p:cNvPr id="14" name="">
             <a:extLst xmlns:a="http://schemas.openxmlformats.org/drawingml/2006/main">
               <a:ext uri="{FF2B5EF4-FFF2-40B4-BE49-F238E27FC236}">
-                <a16:creationId xmlns:a16="http://schemas.microsoft.com/office/drawing/2014/main" id="{B8D78B04-6B0A-4A32-8194-093BE82EC14F}"/>
+                <a16:creationId xmlns:a16="http://schemas.microsoft.com/office/drawing/2014/main" id="{62B8616F-8CC4-4151-B08C-D72C8589464C}"/>
               </a:ext>
             </a:extLst>
           </p:cNvPr>
@@ -5002,7 +5002,7 @@
           <p:cNvPr id="15" name="">
             <a:extLst xmlns:a="http://schemas.openxmlformats.org/drawingml/2006/main">
               <a:ext uri="{FF2B5EF4-FFF2-40B4-BE49-F238E27FC236}">
-                <a16:creationId xmlns:a16="http://schemas.microsoft.com/office/drawing/2014/main" id="{B9AFD024-673A-4D48-9AAF-B006A05C52B3}"/>
+                <a16:creationId xmlns:a16="http://schemas.microsoft.com/office/drawing/2014/main" id="{E20F3937-5335-45D8-9450-5CA07C8DB8FD}"/>
               </a:ext>
             </a:extLst>
           </p:cNvPr>
@@ -5034,7 +5034,7 @@
           <p:cNvPr id="16" name="">
             <a:extLst xmlns:a="http://schemas.openxmlformats.org/drawingml/2006/main">
               <a:ext uri="{FF2B5EF4-FFF2-40B4-BE49-F238E27FC236}">
-                <a16:creationId xmlns:a16="http://schemas.microsoft.com/office/drawing/2014/main" id="{F86D2BFC-8756-4EDB-8A54-D928B041DD02}"/>
+                <a16:creationId xmlns:a16="http://schemas.microsoft.com/office/drawing/2014/main" id="{FF4C5910-FB20-4D67-9B54-83D29F8A31C2}"/>
               </a:ext>
             </a:extLst>
           </p:cNvPr>
@@ -5091,7 +5091,7 @@
           <p:cNvPr id="17" name="">
             <a:extLst xmlns:a="http://schemas.openxmlformats.org/drawingml/2006/main">
               <a:ext uri="{FF2B5EF4-FFF2-40B4-BE49-F238E27FC236}">
-                <a16:creationId xmlns:a16="http://schemas.microsoft.com/office/drawing/2014/main" id="{2B1CD71F-C281-44DC-80F7-0B1E5AA1AAFB}"/>
+                <a16:creationId xmlns:a16="http://schemas.microsoft.com/office/drawing/2014/main" id="{3D5459BB-9012-4EFC-94CC-F16FCF80F879}"/>
               </a:ext>
             </a:extLst>
           </p:cNvPr>
@@ -5148,7 +5148,7 @@
           <p:cNvPr id="18" name="">
             <a:extLst xmlns:a="http://schemas.openxmlformats.org/drawingml/2006/main">
               <a:ext uri="{FF2B5EF4-FFF2-40B4-BE49-F238E27FC236}">
-                <a16:creationId xmlns:a16="http://schemas.microsoft.com/office/drawing/2014/main" id="{29A928B9-A8D3-4661-BD5A-0F90AFC958C4}"/>
+                <a16:creationId xmlns:a16="http://schemas.microsoft.com/office/drawing/2014/main" id="{AEA95B39-A8A7-4635-8C9D-CD0457C76762}"/>
               </a:ext>
             </a:extLst>
           </p:cNvPr>
@@ -5182,7 +5182,7 @@
           <p:cNvPr id="19" name="">
             <a:extLst xmlns:a="http://schemas.openxmlformats.org/drawingml/2006/main">
               <a:ext uri="{FF2B5EF4-FFF2-40B4-BE49-F238E27FC236}">
-                <a16:creationId xmlns:a16="http://schemas.microsoft.com/office/drawing/2014/main" id="{5FA4A4AA-93EC-4924-AD91-0BB36C1A9FF9}"/>
+                <a16:creationId xmlns:a16="http://schemas.microsoft.com/office/drawing/2014/main" id="{65A6ECCC-158E-4E20-A0A8-47590633F73A}"/>
               </a:ext>
             </a:extLst>
           </p:cNvPr>
@@ -5214,7 +5214,7 @@
           <p:cNvPr id="20" name="">
             <a:extLst xmlns:a="http://schemas.openxmlformats.org/drawingml/2006/main">
               <a:ext uri="{FF2B5EF4-FFF2-40B4-BE49-F238E27FC236}">
-                <a16:creationId xmlns:a16="http://schemas.microsoft.com/office/drawing/2014/main" id="{2F915F85-FBB8-48F8-9566-2545169AA513}"/>
+                <a16:creationId xmlns:a16="http://schemas.microsoft.com/office/drawing/2014/main" id="{CF14010F-2306-4D88-BB88-AF15BAC36EB0}"/>
               </a:ext>
             </a:extLst>
           </p:cNvPr>
@@ -5271,7 +5271,7 @@
           <p:cNvPr id="21" name="">
             <a:extLst xmlns:a="http://schemas.openxmlformats.org/drawingml/2006/main">
               <a:ext uri="{FF2B5EF4-FFF2-40B4-BE49-F238E27FC236}">
-                <a16:creationId xmlns:a16="http://schemas.microsoft.com/office/drawing/2014/main" id="{6852788C-CE32-42FC-8FDA-039FC8A15845}"/>
+                <a16:creationId xmlns:a16="http://schemas.microsoft.com/office/drawing/2014/main" id="{12BA1A0E-4426-4B99-82EC-971E8756DB2E}"/>
               </a:ext>
             </a:extLst>
           </p:cNvPr>
@@ -5328,7 +5328,7 @@
           <p:cNvPr id="22" name="">
             <a:extLst xmlns:a="http://schemas.openxmlformats.org/drawingml/2006/main">
               <a:ext uri="{FF2B5EF4-FFF2-40B4-BE49-F238E27FC236}">
-                <a16:creationId xmlns:a16="http://schemas.microsoft.com/office/drawing/2014/main" id="{408AEEFD-1AB5-4ECF-9C92-76379FE58411}"/>
+                <a16:creationId xmlns:a16="http://schemas.microsoft.com/office/drawing/2014/main" id="{A2A1532E-E034-4996-A354-1C1F8F0338A0}"/>
               </a:ext>
             </a:extLst>
           </p:cNvPr>
@@ -5383,7 +5383,7 @@
     </p:spTree>
     <p:extLst>
       <p:ext uri="{BB962C8B-B14F-4D97-AF65-F5344CB8AC3E}">
-        <p14:creationId xmlns:p14="http://schemas.microsoft.com/office/powerpoint/2010/main" val="544477900"/>
+        <p14:creationId xmlns:p14="http://schemas.microsoft.com/office/powerpoint/2010/main" val="1917151357"/>
       </p:ext>
     </p:extLst>
   </p:cSld>
@@ -5584,7 +5584,7 @@
           <p:cNvPr id="23" name="">
             <a:extLst xmlns:a="http://schemas.openxmlformats.org/drawingml/2006/main">
               <a:ext uri="{FF2B5EF4-FFF2-40B4-BE49-F238E27FC236}">
-                <a16:creationId xmlns:a16="http://schemas.microsoft.com/office/drawing/2014/main" id="{F471FEF8-1460-49B9-B3F7-895EAA8DF472}"/>
+                <a16:creationId xmlns:a16="http://schemas.microsoft.com/office/drawing/2014/main" id="{484267E4-6D22-4C01-9962-7D2DC2BF84FD}"/>
               </a:ext>
             </a:extLst>
           </p:cNvPr>
@@ -5616,7 +5616,7 @@
           <p:cNvPr id="2" name="">
             <a:extLst xmlns:a="http://schemas.openxmlformats.org/drawingml/2006/main">
               <a:ext uri="{FF2B5EF4-FFF2-40B4-BE49-F238E27FC236}">
-                <a16:creationId xmlns:a16="http://schemas.microsoft.com/office/drawing/2014/main" id="{D8D301C0-7C6F-4DF6-96CB-A7B344C12A1C}"/>
+                <a16:creationId xmlns:a16="http://schemas.microsoft.com/office/drawing/2014/main" id="{FCBF9D2C-3E9D-4AA9-AB55-64AB01CE8849}"/>
               </a:ext>
             </a:extLst>
           </p:cNvPr>
@@ -5673,7 +5673,7 @@
           <p:cNvPr id="3" name="">
             <a:extLst xmlns:a="http://schemas.openxmlformats.org/drawingml/2006/main">
               <a:ext uri="{FF2B5EF4-FFF2-40B4-BE49-F238E27FC236}">
-                <a16:creationId xmlns:a16="http://schemas.microsoft.com/office/drawing/2014/main" id="{59CB7579-3948-4F9A-B896-57F857A15E45}"/>
+                <a16:creationId xmlns:a16="http://schemas.microsoft.com/office/drawing/2014/main" id="{B42600CE-12BE-45AA-BED5-67596CED2E12}"/>
               </a:ext>
             </a:extLst>
           </p:cNvPr>
@@ -5705,7 +5705,7 @@
           <p:cNvPr id="4" name="">
             <a:extLst xmlns:a="http://schemas.openxmlformats.org/drawingml/2006/main">
               <a:ext uri="{FF2B5EF4-FFF2-40B4-BE49-F238E27FC236}">
-                <a16:creationId xmlns:a16="http://schemas.microsoft.com/office/drawing/2014/main" id="{024704EA-A6D5-4CB4-B9DE-2663DF77A3AA}"/>
+                <a16:creationId xmlns:a16="http://schemas.microsoft.com/office/drawing/2014/main" id="{28B98C3A-69D6-4F90-B84D-C18700C22447}"/>
               </a:ext>
             </a:extLst>
           </p:cNvPr>
@@ -5762,7 +5762,7 @@
           <p:cNvPr id="5" name="">
             <a:extLst xmlns:a="http://schemas.openxmlformats.org/drawingml/2006/main">
               <a:ext uri="{FF2B5EF4-FFF2-40B4-BE49-F238E27FC236}">
-                <a16:creationId xmlns:a16="http://schemas.microsoft.com/office/drawing/2014/main" id="{9E657870-4F4A-45A5-A1D2-5195133C06C8}"/>
+                <a16:creationId xmlns:a16="http://schemas.microsoft.com/office/drawing/2014/main" id="{FED8E3EB-38B8-4ABA-ABBE-0A1116A64E67}"/>
               </a:ext>
             </a:extLst>
           </p:cNvPr>
@@ -5819,7 +5819,7 @@
           <p:cNvPr id="6" name="">
             <a:extLst xmlns:a="http://schemas.openxmlformats.org/drawingml/2006/main">
               <a:ext uri="{FF2B5EF4-FFF2-40B4-BE49-F238E27FC236}">
-                <a16:creationId xmlns:a16="http://schemas.microsoft.com/office/drawing/2014/main" id="{8631AC45-7360-486B-BC28-1E4D2AC19C12}"/>
+                <a16:creationId xmlns:a16="http://schemas.microsoft.com/office/drawing/2014/main" id="{0C9C92D6-0BB6-4BC6-8FD7-41FE53726CE2}"/>
               </a:ext>
             </a:extLst>
           </p:cNvPr>
@@ -5876,7 +5876,7 @@
           <p:cNvPr id="7" name="">
             <a:extLst xmlns:a="http://schemas.openxmlformats.org/drawingml/2006/main">
               <a:ext uri="{FF2B5EF4-FFF2-40B4-BE49-F238E27FC236}">
-                <a16:creationId xmlns:a16="http://schemas.microsoft.com/office/drawing/2014/main" id="{7B8B94E3-A4BE-4386-8132-FCA688962C6E}"/>
+                <a16:creationId xmlns:a16="http://schemas.microsoft.com/office/drawing/2014/main" id="{78E4C572-5E88-4BFD-92A9-FE825C94B55B}"/>
               </a:ext>
             </a:extLst>
           </p:cNvPr>
@@ -5908,7 +5908,7 @@
           <p:cNvPr id="8" name="">
             <a:extLst xmlns:a="http://schemas.openxmlformats.org/drawingml/2006/main">
               <a:ext uri="{FF2B5EF4-FFF2-40B4-BE49-F238E27FC236}">
-                <a16:creationId xmlns:a16="http://schemas.microsoft.com/office/drawing/2014/main" id="{0EA2D5E9-0914-431D-8227-AA739D6DA272}"/>
+                <a16:creationId xmlns:a16="http://schemas.microsoft.com/office/drawing/2014/main" id="{750C4ADC-76A3-4166-B42C-1CDDCE196040}"/>
               </a:ext>
             </a:extLst>
           </p:cNvPr>
@@ -5965,7 +5965,7 @@
           <p:cNvPr id="9" name="">
             <a:extLst xmlns:a="http://schemas.openxmlformats.org/drawingml/2006/main">
               <a:ext uri="{FF2B5EF4-FFF2-40B4-BE49-F238E27FC236}">
-                <a16:creationId xmlns:a16="http://schemas.microsoft.com/office/drawing/2014/main" id="{DE423832-E913-4170-8D65-DCE966A43992}"/>
+                <a16:creationId xmlns:a16="http://schemas.microsoft.com/office/drawing/2014/main" id="{7052F1EE-4B55-4FBC-B55E-194BA40D2CD5}"/>
               </a:ext>
             </a:extLst>
           </p:cNvPr>
@@ -6022,7 +6022,7 @@
           <p:cNvPr id="10" name="">
             <a:extLst xmlns:a="http://schemas.openxmlformats.org/drawingml/2006/main">
               <a:ext uri="{FF2B5EF4-FFF2-40B4-BE49-F238E27FC236}">
-                <a16:creationId xmlns:a16="http://schemas.microsoft.com/office/drawing/2014/main" id="{51AF7DF1-3C60-4F4C-B7BF-53B3250635CC}"/>
+                <a16:creationId xmlns:a16="http://schemas.microsoft.com/office/drawing/2014/main" id="{CA00A1B5-5B23-4D94-8CBF-4037A68712A8}"/>
               </a:ext>
             </a:extLst>
           </p:cNvPr>
@@ -6056,7 +6056,7 @@
           <p:cNvPr id="11" name="">
             <a:extLst xmlns:a="http://schemas.openxmlformats.org/drawingml/2006/main">
               <a:ext uri="{FF2B5EF4-FFF2-40B4-BE49-F238E27FC236}">
-                <a16:creationId xmlns:a16="http://schemas.microsoft.com/office/drawing/2014/main" id="{FBBB2478-6FF4-4E2F-A459-F855984D6AC2}"/>
+                <a16:creationId xmlns:a16="http://schemas.microsoft.com/office/drawing/2014/main" id="{7F8B0709-74C8-4F7E-A800-2E1122F6D687}"/>
               </a:ext>
             </a:extLst>
           </p:cNvPr>
@@ -6088,7 +6088,7 @@
           <p:cNvPr id="12" name="">
             <a:extLst xmlns:a="http://schemas.openxmlformats.org/drawingml/2006/main">
               <a:ext uri="{FF2B5EF4-FFF2-40B4-BE49-F238E27FC236}">
-                <a16:creationId xmlns:a16="http://schemas.microsoft.com/office/drawing/2014/main" id="{61FE925E-341F-4C4D-9097-AB3AB0B73DDB}"/>
+                <a16:creationId xmlns:a16="http://schemas.microsoft.com/office/drawing/2014/main" id="{64D5FD24-7924-4609-A1CB-560BEC077782}"/>
               </a:ext>
             </a:extLst>
           </p:cNvPr>
@@ -6145,7 +6145,7 @@
           <p:cNvPr id="13" name="">
             <a:extLst xmlns:a="http://schemas.openxmlformats.org/drawingml/2006/main">
               <a:ext uri="{FF2B5EF4-FFF2-40B4-BE49-F238E27FC236}">
-                <a16:creationId xmlns:a16="http://schemas.microsoft.com/office/drawing/2014/main" id="{CD7026B0-FB7F-46FE-BC99-36E6D974B680}"/>
+                <a16:creationId xmlns:a16="http://schemas.microsoft.com/office/drawing/2014/main" id="{3CE14233-C3FD-4E81-99F0-C189A1F7FA25}"/>
               </a:ext>
             </a:extLst>
           </p:cNvPr>
@@ -6202,7 +6202,7 @@
           <p:cNvPr id="14" name="">
             <a:extLst xmlns:a="http://schemas.openxmlformats.org/drawingml/2006/main">
               <a:ext uri="{FF2B5EF4-FFF2-40B4-BE49-F238E27FC236}">
-                <a16:creationId xmlns:a16="http://schemas.microsoft.com/office/drawing/2014/main" id="{32B9D726-9030-480E-8CA8-C8011904D436}"/>
+                <a16:creationId xmlns:a16="http://schemas.microsoft.com/office/drawing/2014/main" id="{706913E8-CD59-4434-84F1-1CDD304AEAF5}"/>
               </a:ext>
             </a:extLst>
           </p:cNvPr>
@@ -6236,7 +6236,7 @@
           <p:cNvPr id="15" name="">
             <a:extLst xmlns:a="http://schemas.openxmlformats.org/drawingml/2006/main">
               <a:ext uri="{FF2B5EF4-FFF2-40B4-BE49-F238E27FC236}">
-                <a16:creationId xmlns:a16="http://schemas.microsoft.com/office/drawing/2014/main" id="{990F7F4D-EE5A-473E-95F9-379363D4CEB3}"/>
+                <a16:creationId xmlns:a16="http://schemas.microsoft.com/office/drawing/2014/main" id="{61290DC2-E64A-4F9B-8E9B-0C76EF7E62D4}"/>
               </a:ext>
             </a:extLst>
           </p:cNvPr>
@@ -6268,7 +6268,7 @@
           <p:cNvPr id="16" name="">
             <a:extLst xmlns:a="http://schemas.openxmlformats.org/drawingml/2006/main">
               <a:ext uri="{FF2B5EF4-FFF2-40B4-BE49-F238E27FC236}">
-                <a16:creationId xmlns:a16="http://schemas.microsoft.com/office/drawing/2014/main" id="{F0243CC3-73BD-458B-BBB6-1C3A11303431}"/>
+                <a16:creationId xmlns:a16="http://schemas.microsoft.com/office/drawing/2014/main" id="{BC63A598-E7F8-48C7-90D3-FE2DA7AAE9AE}"/>
               </a:ext>
             </a:extLst>
           </p:cNvPr>
@@ -6325,7 +6325,7 @@
           <p:cNvPr id="17" name="">
             <a:extLst xmlns:a="http://schemas.openxmlformats.org/drawingml/2006/main">
               <a:ext uri="{FF2B5EF4-FFF2-40B4-BE49-F238E27FC236}">
-                <a16:creationId xmlns:a16="http://schemas.microsoft.com/office/drawing/2014/main" id="{C77EA54F-E0C9-4013-A82F-3C89ADF2C83F}"/>
+                <a16:creationId xmlns:a16="http://schemas.microsoft.com/office/drawing/2014/main" id="{75F433D1-B0E8-43C3-ABF2-5134EAB3CAF5}"/>
               </a:ext>
             </a:extLst>
           </p:cNvPr>
@@ -6382,7 +6382,7 @@
           <p:cNvPr id="18" name="">
             <a:extLst xmlns:a="http://schemas.openxmlformats.org/drawingml/2006/main">
               <a:ext uri="{FF2B5EF4-FFF2-40B4-BE49-F238E27FC236}">
-                <a16:creationId xmlns:a16="http://schemas.microsoft.com/office/drawing/2014/main" id="{CCA30CFD-41EA-4922-9C81-3176CAC8A5CD}"/>
+                <a16:creationId xmlns:a16="http://schemas.microsoft.com/office/drawing/2014/main" id="{D394F3A8-D298-4159-B3DC-994F54288AF9}"/>
               </a:ext>
             </a:extLst>
           </p:cNvPr>
@@ -6416,7 +6416,7 @@
           <p:cNvPr id="19" name="">
             <a:extLst xmlns:a="http://schemas.openxmlformats.org/drawingml/2006/main">
               <a:ext uri="{FF2B5EF4-FFF2-40B4-BE49-F238E27FC236}">
-                <a16:creationId xmlns:a16="http://schemas.microsoft.com/office/drawing/2014/main" id="{BAEDDC72-36C7-4B65-BCE8-D1F12AFC7EB0}"/>
+                <a16:creationId xmlns:a16="http://schemas.microsoft.com/office/drawing/2014/main" id="{FEDDA053-5B1B-4E3F-AF5F-1AACB9011663}"/>
               </a:ext>
             </a:extLst>
           </p:cNvPr>
@@ -6448,7 +6448,7 @@
           <p:cNvPr id="20" name="">
             <a:extLst xmlns:a="http://schemas.openxmlformats.org/drawingml/2006/main">
               <a:ext uri="{FF2B5EF4-FFF2-40B4-BE49-F238E27FC236}">
-                <a16:creationId xmlns:a16="http://schemas.microsoft.com/office/drawing/2014/main" id="{60A9222F-7588-4CA0-8582-2D53E77D1520}"/>
+                <a16:creationId xmlns:a16="http://schemas.microsoft.com/office/drawing/2014/main" id="{084C5525-A6F9-4E46-9A30-FFEBF511634A}"/>
               </a:ext>
             </a:extLst>
           </p:cNvPr>
@@ -6505,7 +6505,7 @@
           <p:cNvPr id="21" name="">
             <a:extLst xmlns:a="http://schemas.openxmlformats.org/drawingml/2006/main">
               <a:ext uri="{FF2B5EF4-FFF2-40B4-BE49-F238E27FC236}">
-                <a16:creationId xmlns:a16="http://schemas.microsoft.com/office/drawing/2014/main" id="{24BD0529-093D-4AD5-B4AC-4BBEF0451636}"/>
+                <a16:creationId xmlns:a16="http://schemas.microsoft.com/office/drawing/2014/main" id="{7BD11565-FD0A-4A0A-B642-082C24EEF4CB}"/>
               </a:ext>
             </a:extLst>
           </p:cNvPr>
@@ -6562,7 +6562,7 @@
           <p:cNvPr id="22" name="">
             <a:extLst xmlns:a="http://schemas.openxmlformats.org/drawingml/2006/main">
               <a:ext uri="{FF2B5EF4-FFF2-40B4-BE49-F238E27FC236}">
-                <a16:creationId xmlns:a16="http://schemas.microsoft.com/office/drawing/2014/main" id="{3C094179-8B8B-4677-A69C-057C87B1AE7E}"/>
+                <a16:creationId xmlns:a16="http://schemas.microsoft.com/office/drawing/2014/main" id="{41A3C949-0F68-418E-B162-A493CE10185F}"/>
               </a:ext>
             </a:extLst>
           </p:cNvPr>
@@ -6617,7 +6617,7 @@
     </p:spTree>
     <p:extLst>
       <p:ext uri="{BB962C8B-B14F-4D97-AF65-F5344CB8AC3E}">
-        <p14:creationId xmlns:p14="http://schemas.microsoft.com/office/powerpoint/2010/main" val="28744176"/>
+        <p14:creationId xmlns:p14="http://schemas.microsoft.com/office/powerpoint/2010/main" val="1339880645"/>
       </p:ext>
     </p:extLst>
   </p:cSld>
@@ -6818,7 +6818,7 @@
           <p:cNvPr id="16" name="">
             <a:extLst xmlns:a="http://schemas.openxmlformats.org/drawingml/2006/main">
               <a:ext uri="{FF2B5EF4-FFF2-40B4-BE49-F238E27FC236}">
-                <a16:creationId xmlns:a16="http://schemas.microsoft.com/office/drawing/2014/main" id="{295F87C5-504B-4320-94AD-4B4A2506DE13}"/>
+                <a16:creationId xmlns:a16="http://schemas.microsoft.com/office/drawing/2014/main" id="{53768664-76E4-4C07-9C79-46F430115E40}"/>
               </a:ext>
             </a:extLst>
           </p:cNvPr>
@@ -6850,7 +6850,7 @@
           <p:cNvPr id="2" name="">
             <a:extLst xmlns:a="http://schemas.openxmlformats.org/drawingml/2006/main">
               <a:ext uri="{FF2B5EF4-FFF2-40B4-BE49-F238E27FC236}">
-                <a16:creationId xmlns:a16="http://schemas.microsoft.com/office/drawing/2014/main" id="{9A9C8B32-6D02-4AFA-BFC5-C6E763702A8B}"/>
+                <a16:creationId xmlns:a16="http://schemas.microsoft.com/office/drawing/2014/main" id="{C7E8A206-24DD-450C-B43D-2066636A9C7D}"/>
               </a:ext>
             </a:extLst>
           </p:cNvPr>
@@ -6907,7 +6907,7 @@
           <p:cNvPr id="3" name="">
             <a:extLst xmlns:a="http://schemas.openxmlformats.org/drawingml/2006/main">
               <a:ext uri="{FF2B5EF4-FFF2-40B4-BE49-F238E27FC236}">
-                <a16:creationId xmlns:a16="http://schemas.microsoft.com/office/drawing/2014/main" id="{378714BB-930F-4524-BA0E-B67EA20C3EDA}"/>
+                <a16:creationId xmlns:a16="http://schemas.microsoft.com/office/drawing/2014/main" id="{25EE666C-4945-4458-AA94-D981750A1ADA}"/>
               </a:ext>
             </a:extLst>
           </p:cNvPr>
@@ -6939,7 +6939,7 @@
           <p:cNvPr id="4" name="">
             <a:extLst xmlns:a="http://schemas.openxmlformats.org/drawingml/2006/main">
               <a:ext uri="{FF2B5EF4-FFF2-40B4-BE49-F238E27FC236}">
-                <a16:creationId xmlns:a16="http://schemas.microsoft.com/office/drawing/2014/main" id="{07B6B4F9-FD81-4AD4-9176-908219F57A26}"/>
+                <a16:creationId xmlns:a16="http://schemas.microsoft.com/office/drawing/2014/main" id="{ED89CA8D-F10C-4CF4-8E2B-DA8ABA30E80C}"/>
               </a:ext>
             </a:extLst>
           </p:cNvPr>
@@ -6996,7 +6996,7 @@
           <p:cNvPr id="5" name="">
             <a:extLst xmlns:a="http://schemas.openxmlformats.org/drawingml/2006/main">
               <a:ext uri="{FF2B5EF4-FFF2-40B4-BE49-F238E27FC236}">
-                <a16:creationId xmlns:a16="http://schemas.microsoft.com/office/drawing/2014/main" id="{7A443D54-7B5E-4791-900B-64B7838406BD}"/>
+                <a16:creationId xmlns:a16="http://schemas.microsoft.com/office/drawing/2014/main" id="{E147431F-1C19-4950-92EE-1EDA8BD9E1D0}"/>
               </a:ext>
             </a:extLst>
           </p:cNvPr>
@@ -7053,7 +7053,7 @@
           <p:cNvPr id="6" name="">
             <a:extLst xmlns:a="http://schemas.openxmlformats.org/drawingml/2006/main">
               <a:ext uri="{FF2B5EF4-FFF2-40B4-BE49-F238E27FC236}">
-                <a16:creationId xmlns:a16="http://schemas.microsoft.com/office/drawing/2014/main" id="{190FEF01-D6C9-4C47-A8D0-B67CAE28AABA}"/>
+                <a16:creationId xmlns:a16="http://schemas.microsoft.com/office/drawing/2014/main" id="{5E0B0A27-6DD5-43C3-9DD7-6BBDB07ABA95}"/>
               </a:ext>
             </a:extLst>
           </p:cNvPr>
@@ -7110,7 +7110,7 @@
           <p:cNvPr id="7" name="">
             <a:extLst xmlns:a="http://schemas.openxmlformats.org/drawingml/2006/main">
               <a:ext uri="{FF2B5EF4-FFF2-40B4-BE49-F238E27FC236}">
-                <a16:creationId xmlns:a16="http://schemas.microsoft.com/office/drawing/2014/main" id="{AC544957-83F3-46DF-B862-C2CCA22F24ED}"/>
+                <a16:creationId xmlns:a16="http://schemas.microsoft.com/office/drawing/2014/main" id="{731E0BB3-52EE-4C8B-BF2A-99546BF4F0D3}"/>
               </a:ext>
             </a:extLst>
           </p:cNvPr>
@@ -7142,7 +7142,7 @@
           <p:cNvPr id="8" name="">
             <a:extLst xmlns:a="http://schemas.openxmlformats.org/drawingml/2006/main">
               <a:ext uri="{FF2B5EF4-FFF2-40B4-BE49-F238E27FC236}">
-                <a16:creationId xmlns:a16="http://schemas.microsoft.com/office/drawing/2014/main" id="{537F6D31-3C97-4DB7-8D4E-11CCD1E102F0}"/>
+                <a16:creationId xmlns:a16="http://schemas.microsoft.com/office/drawing/2014/main" id="{F1735B83-D841-47A5-A1A5-7D812D3FD0AD}"/>
               </a:ext>
             </a:extLst>
           </p:cNvPr>
@@ -7199,7 +7199,7 @@
           <p:cNvPr id="9" name="">
             <a:extLst xmlns:a="http://schemas.openxmlformats.org/drawingml/2006/main">
               <a:ext uri="{FF2B5EF4-FFF2-40B4-BE49-F238E27FC236}">
-                <a16:creationId xmlns:a16="http://schemas.microsoft.com/office/drawing/2014/main" id="{2C6D0969-7D3E-4270-8D53-9D61C38D7C96}"/>
+                <a16:creationId xmlns:a16="http://schemas.microsoft.com/office/drawing/2014/main" id="{1DC31555-A60F-42A8-8E09-53B433A2F7C7}"/>
               </a:ext>
             </a:extLst>
           </p:cNvPr>
@@ -7256,7 +7256,7 @@
           <p:cNvPr id="10" name="">
             <a:extLst xmlns:a="http://schemas.openxmlformats.org/drawingml/2006/main">
               <a:ext uri="{FF2B5EF4-FFF2-40B4-BE49-F238E27FC236}">
-                <a16:creationId xmlns:a16="http://schemas.microsoft.com/office/drawing/2014/main" id="{C7E2FD2D-5772-49E7-A009-CFC92F047657}"/>
+                <a16:creationId xmlns:a16="http://schemas.microsoft.com/office/drawing/2014/main" id="{20307C1B-649F-44FE-B2CE-F7B84F4DA5BF}"/>
               </a:ext>
             </a:extLst>
           </p:cNvPr>
@@ -7313,7 +7313,7 @@
           <p:cNvPr id="11" name="">
             <a:extLst xmlns:a="http://schemas.openxmlformats.org/drawingml/2006/main">
               <a:ext uri="{FF2B5EF4-FFF2-40B4-BE49-F238E27FC236}">
-                <a16:creationId xmlns:a16="http://schemas.microsoft.com/office/drawing/2014/main" id="{662CC511-71CB-4F0E-A535-B84EC6269D8E}"/>
+                <a16:creationId xmlns:a16="http://schemas.microsoft.com/office/drawing/2014/main" id="{72C1D5F9-1E5C-4B82-9590-440CAC077732}"/>
               </a:ext>
             </a:extLst>
           </p:cNvPr>
@@ -7345,7 +7345,7 @@
           <p:cNvPr id="12" name="">
             <a:extLst xmlns:a="http://schemas.openxmlformats.org/drawingml/2006/main">
               <a:ext uri="{FF2B5EF4-FFF2-40B4-BE49-F238E27FC236}">
-                <a16:creationId xmlns:a16="http://schemas.microsoft.com/office/drawing/2014/main" id="{E39848CD-628F-474A-B335-396A5B64DC27}"/>
+                <a16:creationId xmlns:a16="http://schemas.microsoft.com/office/drawing/2014/main" id="{4EB708E1-66A4-4121-9AB7-9F6857B6D005}"/>
               </a:ext>
             </a:extLst>
           </p:cNvPr>
@@ -7402,7 +7402,7 @@
           <p:cNvPr id="13" name="">
             <a:extLst xmlns:a="http://schemas.openxmlformats.org/drawingml/2006/main">
               <a:ext uri="{FF2B5EF4-FFF2-40B4-BE49-F238E27FC236}">
-                <a16:creationId xmlns:a16="http://schemas.microsoft.com/office/drawing/2014/main" id="{0CE9AD4A-C209-4831-B214-2E1125283D8D}"/>
+                <a16:creationId xmlns:a16="http://schemas.microsoft.com/office/drawing/2014/main" id="{DF705087-4BF0-42C5-9B81-D5F9E439B7B5}"/>
               </a:ext>
             </a:extLst>
           </p:cNvPr>
@@ -7459,7 +7459,7 @@
           <p:cNvPr id="14" name="">
             <a:extLst xmlns:a="http://schemas.openxmlformats.org/drawingml/2006/main">
               <a:ext uri="{FF2B5EF4-FFF2-40B4-BE49-F238E27FC236}">
-                <a16:creationId xmlns:a16="http://schemas.microsoft.com/office/drawing/2014/main" id="{88555D8D-EC04-4667-BDA0-5A66C6B6E9C8}"/>
+                <a16:creationId xmlns:a16="http://schemas.microsoft.com/office/drawing/2014/main" id="{0A6A30AA-7ABE-45D9-8231-475EE8155159}"/>
               </a:ext>
             </a:extLst>
           </p:cNvPr>
@@ -7516,7 +7516,7 @@
           <p:cNvPr id="15" name="">
             <a:extLst xmlns:a="http://schemas.openxmlformats.org/drawingml/2006/main">
               <a:ext uri="{FF2B5EF4-FFF2-40B4-BE49-F238E27FC236}">
-                <a16:creationId xmlns:a16="http://schemas.microsoft.com/office/drawing/2014/main" id="{13C24A98-F974-41FF-AE66-75B9E467F0F1}"/>
+                <a16:creationId xmlns:a16="http://schemas.microsoft.com/office/drawing/2014/main" id="{0B610712-48D0-42B6-A2B2-7290B0AD5DC3}"/>
               </a:ext>
             </a:extLst>
           </p:cNvPr>
@@ -7571,7 +7571,7 @@
     </p:spTree>
     <p:extLst>
       <p:ext uri="{BB962C8B-B14F-4D97-AF65-F5344CB8AC3E}">
-        <p14:creationId xmlns:p14="http://schemas.microsoft.com/office/powerpoint/2010/main" val="792075630"/>
+        <p14:creationId xmlns:p14="http://schemas.microsoft.com/office/powerpoint/2010/main" val="629980234"/>
       </p:ext>
     </p:extLst>
   </p:cSld>
@@ -7772,7 +7772,7 @@
           <p:cNvPr id="23" name="">
             <a:extLst xmlns:a="http://schemas.openxmlformats.org/drawingml/2006/main">
               <a:ext uri="{FF2B5EF4-FFF2-40B4-BE49-F238E27FC236}">
-                <a16:creationId xmlns:a16="http://schemas.microsoft.com/office/drawing/2014/main" id="{E6714C87-C3FC-4EB0-B54C-DDACBA237C43}"/>
+                <a16:creationId xmlns:a16="http://schemas.microsoft.com/office/drawing/2014/main" id="{01C3EC83-BB65-4AA9-A687-767CD852304B}"/>
               </a:ext>
             </a:extLst>
           </p:cNvPr>
@@ -7804,7 +7804,7 @@
           <p:cNvPr id="2" name="">
             <a:extLst xmlns:a="http://schemas.openxmlformats.org/drawingml/2006/main">
               <a:ext uri="{FF2B5EF4-FFF2-40B4-BE49-F238E27FC236}">
-                <a16:creationId xmlns:a16="http://schemas.microsoft.com/office/drawing/2014/main" id="{2B93CA35-1E2E-4895-A5A3-07A9BF66FB91}"/>
+                <a16:creationId xmlns:a16="http://schemas.microsoft.com/office/drawing/2014/main" id="{93036DEA-5254-4CDC-A405-BFC39B64C6CD}"/>
               </a:ext>
             </a:extLst>
           </p:cNvPr>
@@ -7861,7 +7861,7 @@
           <p:cNvPr id="3" name="">
             <a:extLst xmlns:a="http://schemas.openxmlformats.org/drawingml/2006/main">
               <a:ext uri="{FF2B5EF4-FFF2-40B4-BE49-F238E27FC236}">
-                <a16:creationId xmlns:a16="http://schemas.microsoft.com/office/drawing/2014/main" id="{C4C15144-6814-4890-BCDA-B2C9359FA50F}"/>
+                <a16:creationId xmlns:a16="http://schemas.microsoft.com/office/drawing/2014/main" id="{C9D10241-74EF-4DA6-A626-EAF24427E293}"/>
               </a:ext>
             </a:extLst>
           </p:cNvPr>
@@ -7893,7 +7893,7 @@
           <p:cNvPr id="4" name="">
             <a:extLst xmlns:a="http://schemas.openxmlformats.org/drawingml/2006/main">
               <a:ext uri="{FF2B5EF4-FFF2-40B4-BE49-F238E27FC236}">
-                <a16:creationId xmlns:a16="http://schemas.microsoft.com/office/drawing/2014/main" id="{FBF86284-BE3F-445F-984B-5A30E7E3B14F}"/>
+                <a16:creationId xmlns:a16="http://schemas.microsoft.com/office/drawing/2014/main" id="{A1823ACA-24C2-4E7C-A911-2B650B6A1C2C}"/>
               </a:ext>
             </a:extLst>
           </p:cNvPr>
@@ -7950,7 +7950,7 @@
           <p:cNvPr id="5" name="">
             <a:extLst xmlns:a="http://schemas.openxmlformats.org/drawingml/2006/main">
               <a:ext uri="{FF2B5EF4-FFF2-40B4-BE49-F238E27FC236}">
-                <a16:creationId xmlns:a16="http://schemas.microsoft.com/office/drawing/2014/main" id="{536F61DB-0AAE-4290-B97F-CBCAFB8649B8}"/>
+                <a16:creationId xmlns:a16="http://schemas.microsoft.com/office/drawing/2014/main" id="{E88A91D2-3388-4F54-B717-30D22863A037}"/>
               </a:ext>
             </a:extLst>
           </p:cNvPr>
@@ -8007,7 +8007,7 @@
           <p:cNvPr id="6" name="">
             <a:extLst xmlns:a="http://schemas.openxmlformats.org/drawingml/2006/main">
               <a:ext uri="{FF2B5EF4-FFF2-40B4-BE49-F238E27FC236}">
-                <a16:creationId xmlns:a16="http://schemas.microsoft.com/office/drawing/2014/main" id="{9E98A929-7144-4494-A9CF-A6865B753E83}"/>
+                <a16:creationId xmlns:a16="http://schemas.microsoft.com/office/drawing/2014/main" id="{B1FCCB4F-013D-4039-A909-4A97F09559A0}"/>
               </a:ext>
             </a:extLst>
           </p:cNvPr>
@@ -8064,7 +8064,7 @@
           <p:cNvPr id="7" name="">
             <a:extLst xmlns:a="http://schemas.openxmlformats.org/drawingml/2006/main">
               <a:ext uri="{FF2B5EF4-FFF2-40B4-BE49-F238E27FC236}">
-                <a16:creationId xmlns:a16="http://schemas.microsoft.com/office/drawing/2014/main" id="{CA06C4A4-166B-4F1D-9635-4F2D13405D66}"/>
+                <a16:creationId xmlns:a16="http://schemas.microsoft.com/office/drawing/2014/main" id="{A6F9CCF1-BCCD-4EAF-B780-BC7A792AF4E8}"/>
               </a:ext>
             </a:extLst>
           </p:cNvPr>
@@ -8096,7 +8096,7 @@
           <p:cNvPr id="8" name="">
             <a:extLst xmlns:a="http://schemas.openxmlformats.org/drawingml/2006/main">
               <a:ext uri="{FF2B5EF4-FFF2-40B4-BE49-F238E27FC236}">
-                <a16:creationId xmlns:a16="http://schemas.microsoft.com/office/drawing/2014/main" id="{B2355EFE-24C2-4F22-A782-E87C5C4EC2B1}"/>
+                <a16:creationId xmlns:a16="http://schemas.microsoft.com/office/drawing/2014/main" id="{3ACB052B-6C3F-4C77-AE12-D255DC32D1DE}"/>
               </a:ext>
             </a:extLst>
           </p:cNvPr>
@@ -8153,7 +8153,7 @@
           <p:cNvPr id="9" name="">
             <a:extLst xmlns:a="http://schemas.openxmlformats.org/drawingml/2006/main">
               <a:ext uri="{FF2B5EF4-FFF2-40B4-BE49-F238E27FC236}">
-                <a16:creationId xmlns:a16="http://schemas.microsoft.com/office/drawing/2014/main" id="{CD7D5A8E-4E29-408B-A6D8-B19AB6149893}"/>
+                <a16:creationId xmlns:a16="http://schemas.microsoft.com/office/drawing/2014/main" id="{0E250A92-EDB5-443C-9BE7-ECB85B00AD54}"/>
               </a:ext>
             </a:extLst>
           </p:cNvPr>
@@ -8210,19 +8210,19 @@
           <p:cNvPr id="10" name="">
             <a:extLst xmlns:a="http://schemas.openxmlformats.org/drawingml/2006/main">
               <a:ext uri="{FF2B5EF4-FFF2-40B4-BE49-F238E27FC236}">
-                <a16:creationId xmlns:a16="http://schemas.microsoft.com/office/drawing/2014/main" id="{42B03CD2-3B97-4129-8DCC-B3738F67C536}"/>
-              </a:ext>
-            </a:extLst>
-          </p:cNvPr>
-          <p:cNvSpPr>
-            <a:spLocks xmlns:a="http://schemas.openxmlformats.org/drawingml/2006/main" noGrp="1"/>
-          </p:cNvSpPr>
-          <p:nvPr/>
-        </p:nvSpPr>
-        <p:spPr>
-          <a:xfrm xmlns:a="http://schemas.openxmlformats.org/drawingml/2006/main">
-            <a:off x="914400" y="1257300"/>
-            <a:ext cx="10363200" cy="781050"/>
+                <a16:creationId xmlns:a16="http://schemas.microsoft.com/office/drawing/2014/main" id="{8E4472EC-0D9B-4E90-80CE-359285080D13}"/>
+              </a:ext>
+            </a:extLst>
+          </p:cNvPr>
+          <p:cNvSpPr>
+            <a:spLocks xmlns:a="http://schemas.openxmlformats.org/drawingml/2006/main" noGrp="1"/>
+          </p:cNvSpPr>
+          <p:nvPr/>
+        </p:nvSpPr>
+        <p:spPr>
+          <a:xfrm xmlns:a="http://schemas.openxmlformats.org/drawingml/2006/main">
+            <a:off x="857250" y="1219200"/>
+            <a:ext cx="10477500" cy="742950"/>
           </a:xfrm>
           <a:prstGeom xmlns:a="http://schemas.openxmlformats.org/drawingml/2006/main" prst="rect">
             <a:avLst/>
@@ -8239,7 +8239,7 @@
           <a:lstStyle xmlns:a="http://schemas.openxmlformats.org/drawingml/2006/main"/>
           <a:p xmlns:a="http://schemas.openxmlformats.org/drawingml/2006/main">
             <a:pPr algn="ctr">
-              <a:defRPr sz="2175" b="1">
+              <a:defRPr sz="2100" b="1">
                 <a:solidFill>
                   <a:srgbClr val="17253A"/>
                 </a:solidFill>
@@ -8249,7 +8249,7 @@
               </a:defRPr>
             </a:pPr>
             <a:r>
-              <a:rPr sz="2175" b="1">
+              <a:rPr sz="2100" b="1">
                 <a:solidFill>
                   <a:srgbClr val="17253A"/>
                 </a:solidFill>
@@ -8267,28 +8267,30 @@
           <p:cNvPr id="11" name="">
             <a:extLst xmlns:a="http://schemas.openxmlformats.org/drawingml/2006/main">
               <a:ext uri="{FF2B5EF4-FFF2-40B4-BE49-F238E27FC236}">
-                <a16:creationId xmlns:a16="http://schemas.microsoft.com/office/drawing/2014/main" id="{96E454C9-6EDB-45B7-BE39-1447AC02C721}"/>
-              </a:ext>
-            </a:extLst>
-          </p:cNvPr>
-          <p:cNvSpPr>
-            <a:spLocks xmlns:a="http://schemas.openxmlformats.org/drawingml/2006/main" noGrp="1"/>
-          </p:cNvSpPr>
-          <p:nvPr/>
-        </p:nvSpPr>
-        <p:spPr>
-          <a:xfrm xmlns:a="http://schemas.openxmlformats.org/drawingml/2006/main">
-            <a:off x="1000125" y="2247900"/>
-            <a:ext cx="476250" cy="476250"/>
-          </a:xfrm>
-          <a:prstGeom xmlns:a="http://schemas.openxmlformats.org/drawingml/2006/main" prst="ellipse">
+                <a16:creationId xmlns:a16="http://schemas.microsoft.com/office/drawing/2014/main" id="{49973830-61F0-45BE-B65E-9E109F81431A}"/>
+              </a:ext>
+            </a:extLst>
+          </p:cNvPr>
+          <p:cNvSpPr>
+            <a:spLocks xmlns:a="http://schemas.openxmlformats.org/drawingml/2006/main" noGrp="1"/>
+          </p:cNvSpPr>
+          <p:nvPr/>
+        </p:nvSpPr>
+        <p:spPr>
+          <a:xfrm xmlns:a="http://schemas.openxmlformats.org/drawingml/2006/main">
+            <a:off x="971550" y="2124075"/>
+            <a:ext cx="38100" cy="3524250"/>
+          </a:xfrm>
+          <a:prstGeom xmlns:a="http://schemas.openxmlformats.org/drawingml/2006/main" prst="rect">
             <a:avLst/>
           </a:prstGeom>
           <a:solidFill xmlns:a="http://schemas.openxmlformats.org/drawingml/2006/main">
-            <a:srgbClr val="18324A"/>
+            <a:srgbClr val="2C6E73"/>
           </a:solidFill>
           <a:ln xmlns:a="http://schemas.openxmlformats.org/drawingml/2006/main" w="0">
-            <a:noFill/>
+            <a:solidFill>
+              <a:srgbClr val="2C6E73"/>
+            </a:solidFill>
           </a:ln>
         </p:spPr>
       </p:sp>
@@ -8297,19 +8299,19 @@
           <p:cNvPr id="12" name="">
             <a:extLst xmlns:a="http://schemas.openxmlformats.org/drawingml/2006/main">
               <a:ext uri="{FF2B5EF4-FFF2-40B4-BE49-F238E27FC236}">
-                <a16:creationId xmlns:a16="http://schemas.microsoft.com/office/drawing/2014/main" id="{6DBB6E44-CF29-4626-8D5B-EAFE0623FDF4}"/>
-              </a:ext>
-            </a:extLst>
-          </p:cNvPr>
-          <p:cNvSpPr>
-            <a:spLocks xmlns:a="http://schemas.openxmlformats.org/drawingml/2006/main" noGrp="1"/>
-          </p:cNvSpPr>
-          <p:nvPr/>
-        </p:nvSpPr>
-        <p:spPr>
-          <a:xfrm xmlns:a="http://schemas.openxmlformats.org/drawingml/2006/main">
-            <a:off x="1000125" y="2276475"/>
-            <a:ext cx="476250" cy="419100"/>
+                <a16:creationId xmlns:a16="http://schemas.microsoft.com/office/drawing/2014/main" id="{0D93F9C8-D79B-4164-806B-8FC2612FD824}"/>
+              </a:ext>
+            </a:extLst>
+          </p:cNvPr>
+          <p:cNvSpPr>
+            <a:spLocks xmlns:a="http://schemas.openxmlformats.org/drawingml/2006/main" noGrp="1"/>
+          </p:cNvSpPr>
+          <p:nvPr/>
+        </p:nvSpPr>
+        <p:spPr>
+          <a:xfrm xmlns:a="http://schemas.openxmlformats.org/drawingml/2006/main">
+            <a:off x="1162050" y="2200275"/>
+            <a:ext cx="400050" cy="400050"/>
           </a:xfrm>
           <a:prstGeom xmlns:a="http://schemas.openxmlformats.org/drawingml/2006/main" prst="rect">
             <a:avLst/>
@@ -8326,9 +8328,9 @@
           <a:lstStyle xmlns:a="http://schemas.openxmlformats.org/drawingml/2006/main"/>
           <a:p xmlns:a="http://schemas.openxmlformats.org/drawingml/2006/main">
             <a:pPr algn="ctr">
-              <a:defRPr sz="1350" b="1">
-                <a:solidFill>
-                  <a:srgbClr val="FFFFFF"/>
+              <a:defRPr sz="1125" b="1">
+                <a:solidFill>
+                  <a:srgbClr val="2C6E73"/>
                 </a:solidFill>
                 <a:latin typeface="Arial"/>
                 <a:ea typeface="Arial"/>
@@ -8336,9 +8338,9 @@
               </a:defRPr>
             </a:pPr>
             <a:r>
-              <a:rPr sz="1350" b="1">
-                <a:solidFill>
-                  <a:srgbClr val="FFFFFF"/>
+              <a:rPr sz="1125" b="1">
+                <a:solidFill>
+                  <a:srgbClr val="2C6E73"/>
                 </a:solidFill>
                 <a:latin typeface="Arial"/>
                 <a:ea typeface="Arial"/>
@@ -8354,19 +8356,19 @@
           <p:cNvPr id="13" name="">
             <a:extLst xmlns:a="http://schemas.openxmlformats.org/drawingml/2006/main">
               <a:ext uri="{FF2B5EF4-FFF2-40B4-BE49-F238E27FC236}">
-                <a16:creationId xmlns:a16="http://schemas.microsoft.com/office/drawing/2014/main" id="{BA464267-D3D0-4A9B-A4BE-27819398EE37}"/>
-              </a:ext>
-            </a:extLst>
-          </p:cNvPr>
-          <p:cNvSpPr>
-            <a:spLocks xmlns:a="http://schemas.openxmlformats.org/drawingml/2006/main" noGrp="1"/>
-          </p:cNvSpPr>
-          <p:nvPr/>
-        </p:nvSpPr>
-        <p:spPr>
-          <a:xfrm xmlns:a="http://schemas.openxmlformats.org/drawingml/2006/main">
-            <a:off x="1714500" y="2181225"/>
-            <a:ext cx="9429750" cy="609600"/>
+                <a16:creationId xmlns:a16="http://schemas.microsoft.com/office/drawing/2014/main" id="{81767830-2DE0-4A8D-AA1B-71B4404A6DF3}"/>
+              </a:ext>
+            </a:extLst>
+          </p:cNvPr>
+          <p:cNvSpPr>
+            <a:spLocks xmlns:a="http://schemas.openxmlformats.org/drawingml/2006/main" noGrp="1"/>
+          </p:cNvSpPr>
+          <p:nvPr/>
+        </p:nvSpPr>
+        <p:spPr>
+          <a:xfrm xmlns:a="http://schemas.openxmlformats.org/drawingml/2006/main">
+            <a:off x="1714500" y="2114550"/>
+            <a:ext cx="9525000" cy="809625"/>
           </a:xfrm>
           <a:prstGeom xmlns:a="http://schemas.openxmlformats.org/drawingml/2006/main" prst="rect">
             <a:avLst/>
@@ -8383,7 +8385,7 @@
           <a:lstStyle xmlns:a="http://schemas.openxmlformats.org/drawingml/2006/main"/>
           <a:p xmlns:a="http://schemas.openxmlformats.org/drawingml/2006/main">
             <a:pPr algn="l">
-              <a:defRPr sz="1500" b="0">
+              <a:defRPr sz="1725" b="0">
                 <a:solidFill>
                   <a:srgbClr val="17253A"/>
                 </a:solidFill>
@@ -8393,7 +8395,7 @@
               </a:defRPr>
             </a:pPr>
             <a:r>
-              <a:rPr sz="1500" b="0">
+              <a:rPr sz="1725" b="0">
                 <a:solidFill>
                   <a:srgbClr val="17253A"/>
                 </a:solidFill>
@@ -8401,7 +8403,7 @@
                 <a:ea typeface="Arial"/>
                 <a:cs typeface="Arial"/>
               </a:rPr>
-              <a:t>Identify the structure: Identify the three perpendicular dimensions in one unit.</a:t>
+              <a:t>5 layers of 24 cubes</a:t>
             </a:r>
           </a:p>
         </p:txBody>
@@ -8411,28 +8413,30 @@
           <p:cNvPr id="14" name="">
             <a:extLst xmlns:a="http://schemas.openxmlformats.org/drawingml/2006/main">
               <a:ext uri="{FF2B5EF4-FFF2-40B4-BE49-F238E27FC236}">
-                <a16:creationId xmlns:a16="http://schemas.microsoft.com/office/drawing/2014/main" id="{EE5E9731-83C1-4172-BC5A-04D4D3BD103D}"/>
-              </a:ext>
-            </a:extLst>
-          </p:cNvPr>
-          <p:cNvSpPr>
-            <a:spLocks xmlns:a="http://schemas.openxmlformats.org/drawingml/2006/main" noGrp="1"/>
-          </p:cNvSpPr>
-          <p:nvPr/>
-        </p:nvSpPr>
-        <p:spPr>
-          <a:xfrm xmlns:a="http://schemas.openxmlformats.org/drawingml/2006/main">
-            <a:off x="1000125" y="2990850"/>
-            <a:ext cx="476250" cy="476250"/>
-          </a:xfrm>
-          <a:prstGeom xmlns:a="http://schemas.openxmlformats.org/drawingml/2006/main" prst="ellipse">
+                <a16:creationId xmlns:a16="http://schemas.microsoft.com/office/drawing/2014/main" id="{73AAA2B0-6E10-4B0A-A0D0-70F2B408596D}"/>
+              </a:ext>
+            </a:extLst>
+          </p:cNvPr>
+          <p:cNvSpPr>
+            <a:spLocks xmlns:a="http://schemas.openxmlformats.org/drawingml/2006/main" noGrp="1"/>
+          </p:cNvSpPr>
+          <p:nvPr/>
+        </p:nvSpPr>
+        <p:spPr>
+          <a:xfrm xmlns:a="http://schemas.openxmlformats.org/drawingml/2006/main">
+            <a:off x="1714500" y="2943225"/>
+            <a:ext cx="9334500" cy="9525"/>
+          </a:xfrm>
+          <a:prstGeom xmlns:a="http://schemas.openxmlformats.org/drawingml/2006/main" prst="rect">
             <a:avLst/>
           </a:prstGeom>
           <a:solidFill xmlns:a="http://schemas.openxmlformats.org/drawingml/2006/main">
-            <a:srgbClr val="2C6E73"/>
+            <a:srgbClr val="D9E0E6"/>
           </a:solidFill>
           <a:ln xmlns:a="http://schemas.openxmlformats.org/drawingml/2006/main" w="0">
-            <a:noFill/>
+            <a:solidFill>
+              <a:srgbClr val="D9E0E6"/>
+            </a:solidFill>
           </a:ln>
         </p:spPr>
       </p:sp>
@@ -8441,19 +8445,19 @@
           <p:cNvPr id="15" name="">
             <a:extLst xmlns:a="http://schemas.openxmlformats.org/drawingml/2006/main">
               <a:ext uri="{FF2B5EF4-FFF2-40B4-BE49-F238E27FC236}">
-                <a16:creationId xmlns:a16="http://schemas.microsoft.com/office/drawing/2014/main" id="{AB66730F-65C6-4493-BF09-751D721C8D03}"/>
-              </a:ext>
-            </a:extLst>
-          </p:cNvPr>
-          <p:cNvSpPr>
-            <a:spLocks xmlns:a="http://schemas.openxmlformats.org/drawingml/2006/main" noGrp="1"/>
-          </p:cNvSpPr>
-          <p:nvPr/>
-        </p:nvSpPr>
-        <p:spPr>
-          <a:xfrm xmlns:a="http://schemas.openxmlformats.org/drawingml/2006/main">
-            <a:off x="1000125" y="3019425"/>
-            <a:ext cx="476250" cy="419100"/>
+                <a16:creationId xmlns:a16="http://schemas.microsoft.com/office/drawing/2014/main" id="{84C5F829-0D2A-44B6-9549-6FD1031709D9}"/>
+              </a:ext>
+            </a:extLst>
+          </p:cNvPr>
+          <p:cNvSpPr>
+            <a:spLocks xmlns:a="http://schemas.openxmlformats.org/drawingml/2006/main" noGrp="1"/>
+          </p:cNvSpPr>
+          <p:nvPr/>
+        </p:nvSpPr>
+        <p:spPr>
+          <a:xfrm xmlns:a="http://schemas.openxmlformats.org/drawingml/2006/main">
+            <a:off x="1162050" y="3076575"/>
+            <a:ext cx="400050" cy="400050"/>
           </a:xfrm>
           <a:prstGeom xmlns:a="http://schemas.openxmlformats.org/drawingml/2006/main" prst="rect">
             <a:avLst/>
@@ -8470,9 +8474,9 @@
           <a:lstStyle xmlns:a="http://schemas.openxmlformats.org/drawingml/2006/main"/>
           <a:p xmlns:a="http://schemas.openxmlformats.org/drawingml/2006/main">
             <a:pPr algn="ctr">
-              <a:defRPr sz="1350" b="1">
-                <a:solidFill>
-                  <a:srgbClr val="FFFFFF"/>
+              <a:defRPr sz="1125" b="1">
+                <a:solidFill>
+                  <a:srgbClr val="2C6E73"/>
                 </a:solidFill>
                 <a:latin typeface="Arial"/>
                 <a:ea typeface="Arial"/>
@@ -8480,9 +8484,9 @@
               </a:defRPr>
             </a:pPr>
             <a:r>
-              <a:rPr sz="1350" b="1">
-                <a:solidFill>
-                  <a:srgbClr val="FFFFFF"/>
+              <a:rPr sz="1125" b="1">
+                <a:solidFill>
+                  <a:srgbClr val="2C6E73"/>
                 </a:solidFill>
                 <a:latin typeface="Arial"/>
                 <a:ea typeface="Arial"/>
@@ -8498,19 +8502,19 @@
           <p:cNvPr id="16" name="">
             <a:extLst xmlns:a="http://schemas.openxmlformats.org/drawingml/2006/main">
               <a:ext uri="{FF2B5EF4-FFF2-40B4-BE49-F238E27FC236}">
-                <a16:creationId xmlns:a16="http://schemas.microsoft.com/office/drawing/2014/main" id="{E6EC7140-E60F-42B6-82BB-AB38DB7E88B5}"/>
-              </a:ext>
-            </a:extLst>
-          </p:cNvPr>
-          <p:cNvSpPr>
-            <a:spLocks xmlns:a="http://schemas.openxmlformats.org/drawingml/2006/main" noGrp="1"/>
-          </p:cNvSpPr>
-          <p:nvPr/>
-        </p:nvSpPr>
-        <p:spPr>
-          <a:xfrm xmlns:a="http://schemas.openxmlformats.org/drawingml/2006/main">
-            <a:off x="1714500" y="2924175"/>
-            <a:ext cx="9429750" cy="609600"/>
+                <a16:creationId xmlns:a16="http://schemas.microsoft.com/office/drawing/2014/main" id="{E11B06D0-55B6-48BB-A8F3-D64883507D2C}"/>
+              </a:ext>
+            </a:extLst>
+          </p:cNvPr>
+          <p:cNvSpPr>
+            <a:spLocks xmlns:a="http://schemas.openxmlformats.org/drawingml/2006/main" noGrp="1"/>
+          </p:cNvSpPr>
+          <p:nvPr/>
+        </p:nvSpPr>
+        <p:spPr>
+          <a:xfrm xmlns:a="http://schemas.openxmlformats.org/drawingml/2006/main">
+            <a:off x="1714500" y="2990850"/>
+            <a:ext cx="9525000" cy="809625"/>
           </a:xfrm>
           <a:prstGeom xmlns:a="http://schemas.openxmlformats.org/drawingml/2006/main" prst="rect">
             <a:avLst/>
@@ -8527,7 +8531,7 @@
           <a:lstStyle xmlns:a="http://schemas.openxmlformats.org/drawingml/2006/main"/>
           <a:p xmlns:a="http://schemas.openxmlformats.org/drawingml/2006/main">
             <a:pPr algn="l">
-              <a:defRPr sz="1500" b="0">
+              <a:defRPr sz="1725" b="0">
                 <a:solidFill>
                   <a:srgbClr val="17253A"/>
                 </a:solidFill>
@@ -8537,7 +8541,7 @@
               </a:defRPr>
             </a:pPr>
             <a:r>
-              <a:rPr sz="1500" b="0">
+              <a:rPr sz="1725" b="0">
                 <a:solidFill>
                   <a:srgbClr val="17253A"/>
                 </a:solidFill>
@@ -8545,7 +8549,7 @@
                 <a:ea typeface="Arial"/>
                 <a:cs typeface="Arial"/>
               </a:rPr>
-              <a:t>Set up the method: Multiply length by width by height.</a:t>
+              <a:t>Volume = cubes per layer × number of layers</a:t>
             </a:r>
           </a:p>
         </p:txBody>
@@ -8555,28 +8559,30 @@
           <p:cNvPr id="17" name="">
             <a:extLst xmlns:a="http://schemas.openxmlformats.org/drawingml/2006/main">
               <a:ext uri="{FF2B5EF4-FFF2-40B4-BE49-F238E27FC236}">
-                <a16:creationId xmlns:a16="http://schemas.microsoft.com/office/drawing/2014/main" id="{F08F752E-4D75-4695-8D37-1D0440F51B3F}"/>
-              </a:ext>
-            </a:extLst>
-          </p:cNvPr>
-          <p:cNvSpPr>
-            <a:spLocks xmlns:a="http://schemas.openxmlformats.org/drawingml/2006/main" noGrp="1"/>
-          </p:cNvSpPr>
-          <p:nvPr/>
-        </p:nvSpPr>
-        <p:spPr>
-          <a:xfrm xmlns:a="http://schemas.openxmlformats.org/drawingml/2006/main">
-            <a:off x="1000125" y="3733800"/>
-            <a:ext cx="476250" cy="476250"/>
-          </a:xfrm>
-          <a:prstGeom xmlns:a="http://schemas.openxmlformats.org/drawingml/2006/main" prst="ellipse">
+                <a16:creationId xmlns:a16="http://schemas.microsoft.com/office/drawing/2014/main" id="{1D75E16E-9DC3-4F25-9EB9-A26A42DE3178}"/>
+              </a:ext>
+            </a:extLst>
+          </p:cNvPr>
+          <p:cNvSpPr>
+            <a:spLocks xmlns:a="http://schemas.openxmlformats.org/drawingml/2006/main" noGrp="1"/>
+          </p:cNvSpPr>
+          <p:nvPr/>
+        </p:nvSpPr>
+        <p:spPr>
+          <a:xfrm xmlns:a="http://schemas.openxmlformats.org/drawingml/2006/main">
+            <a:off x="1714500" y="3819525"/>
+            <a:ext cx="9334500" cy="9525"/>
+          </a:xfrm>
+          <a:prstGeom xmlns:a="http://schemas.openxmlformats.org/drawingml/2006/main" prst="rect">
             <a:avLst/>
           </a:prstGeom>
           <a:solidFill xmlns:a="http://schemas.openxmlformats.org/drawingml/2006/main">
-            <a:srgbClr val="2C6E73"/>
+            <a:srgbClr val="D9E0E6"/>
           </a:solidFill>
           <a:ln xmlns:a="http://schemas.openxmlformats.org/drawingml/2006/main" w="0">
-            <a:noFill/>
+            <a:solidFill>
+              <a:srgbClr val="D9E0E6"/>
+            </a:solidFill>
           </a:ln>
         </p:spPr>
       </p:sp>
@@ -8585,19 +8591,19 @@
           <p:cNvPr id="18" name="">
             <a:extLst xmlns:a="http://schemas.openxmlformats.org/drawingml/2006/main">
               <a:ext uri="{FF2B5EF4-FFF2-40B4-BE49-F238E27FC236}">
-                <a16:creationId xmlns:a16="http://schemas.microsoft.com/office/drawing/2014/main" id="{8B8BD618-8287-4EF6-A4D5-B9A6C21EEC9A}"/>
-              </a:ext>
-            </a:extLst>
-          </p:cNvPr>
-          <p:cNvSpPr>
-            <a:spLocks xmlns:a="http://schemas.openxmlformats.org/drawingml/2006/main" noGrp="1"/>
-          </p:cNvSpPr>
-          <p:nvPr/>
-        </p:nvSpPr>
-        <p:spPr>
-          <a:xfrm xmlns:a="http://schemas.openxmlformats.org/drawingml/2006/main">
-            <a:off x="1000125" y="3762375"/>
-            <a:ext cx="476250" cy="419100"/>
+                <a16:creationId xmlns:a16="http://schemas.microsoft.com/office/drawing/2014/main" id="{E0C613C7-94E4-4E76-8740-1C66D90A0C67}"/>
+              </a:ext>
+            </a:extLst>
+          </p:cNvPr>
+          <p:cNvSpPr>
+            <a:spLocks xmlns:a="http://schemas.openxmlformats.org/drawingml/2006/main" noGrp="1"/>
+          </p:cNvSpPr>
+          <p:nvPr/>
+        </p:nvSpPr>
+        <p:spPr>
+          <a:xfrm xmlns:a="http://schemas.openxmlformats.org/drawingml/2006/main">
+            <a:off x="1162050" y="3952875"/>
+            <a:ext cx="400050" cy="400050"/>
           </a:xfrm>
           <a:prstGeom xmlns:a="http://schemas.openxmlformats.org/drawingml/2006/main" prst="rect">
             <a:avLst/>
@@ -8614,9 +8620,9 @@
           <a:lstStyle xmlns:a="http://schemas.openxmlformats.org/drawingml/2006/main"/>
           <a:p xmlns:a="http://schemas.openxmlformats.org/drawingml/2006/main">
             <a:pPr algn="ctr">
-              <a:defRPr sz="1350" b="1">
-                <a:solidFill>
-                  <a:srgbClr val="FFFFFF"/>
+              <a:defRPr sz="1125" b="1">
+                <a:solidFill>
+                  <a:srgbClr val="2C6E73"/>
                 </a:solidFill>
                 <a:latin typeface="Arial"/>
                 <a:ea typeface="Arial"/>
@@ -8624,9 +8630,9 @@
               </a:defRPr>
             </a:pPr>
             <a:r>
-              <a:rPr sz="1350" b="1">
-                <a:solidFill>
-                  <a:srgbClr val="FFFFFF"/>
+              <a:rPr sz="1125" b="1">
+                <a:solidFill>
+                  <a:srgbClr val="2C6E73"/>
                 </a:solidFill>
                 <a:latin typeface="Arial"/>
                 <a:ea typeface="Arial"/>
@@ -8642,19 +8648,19 @@
           <p:cNvPr id="19" name="">
             <a:extLst xmlns:a="http://schemas.openxmlformats.org/drawingml/2006/main">
               <a:ext uri="{FF2B5EF4-FFF2-40B4-BE49-F238E27FC236}">
-                <a16:creationId xmlns:a16="http://schemas.microsoft.com/office/drawing/2014/main" id="{7E5D5C6D-7291-4EBC-A5A1-5C6599360EEB}"/>
-              </a:ext>
-            </a:extLst>
-          </p:cNvPr>
-          <p:cNvSpPr>
-            <a:spLocks xmlns:a="http://schemas.openxmlformats.org/drawingml/2006/main" noGrp="1"/>
-          </p:cNvSpPr>
-          <p:nvPr/>
-        </p:nvSpPr>
-        <p:spPr>
-          <a:xfrm xmlns:a="http://schemas.openxmlformats.org/drawingml/2006/main">
-            <a:off x="1714500" y="3667125"/>
-            <a:ext cx="9429750" cy="609600"/>
+                <a16:creationId xmlns:a16="http://schemas.microsoft.com/office/drawing/2014/main" id="{C015968F-2805-4A8C-AE3D-F5857C1A9B91}"/>
+              </a:ext>
+            </a:extLst>
+          </p:cNvPr>
+          <p:cNvSpPr>
+            <a:spLocks xmlns:a="http://schemas.openxmlformats.org/drawingml/2006/main" noGrp="1"/>
+          </p:cNvSpPr>
+          <p:nvPr/>
+        </p:nvSpPr>
+        <p:spPr>
+          <a:xfrm xmlns:a="http://schemas.openxmlformats.org/drawingml/2006/main">
+            <a:off x="1714500" y="3867150"/>
+            <a:ext cx="9525000" cy="809625"/>
           </a:xfrm>
           <a:prstGeom xmlns:a="http://schemas.openxmlformats.org/drawingml/2006/main" prst="rect">
             <a:avLst/>
@@ -8671,7 +8677,7 @@
           <a:lstStyle xmlns:a="http://schemas.openxmlformats.org/drawingml/2006/main"/>
           <a:p xmlns:a="http://schemas.openxmlformats.org/drawingml/2006/main">
             <a:pPr algn="l">
-              <a:defRPr sz="1500" b="0">
+              <a:defRPr sz="1725" b="0">
                 <a:solidFill>
                   <a:srgbClr val="17253A"/>
                 </a:solidFill>
@@ -8681,7 +8687,7 @@
               </a:defRPr>
             </a:pPr>
             <a:r>
-              <a:rPr sz="1500" b="0">
+              <a:rPr sz="1725" b="0">
                 <a:solidFill>
                   <a:srgbClr val="17253A"/>
                 </a:solidFill>
@@ -8689,7 +8695,7 @@
                 <a:ea typeface="Arial"/>
                 <a:cs typeface="Arial"/>
               </a:rPr>
-              <a:t>Complete the calculation: 120 cubic units.</a:t>
+              <a:t>24 × 5</a:t>
             </a:r>
           </a:p>
         </p:txBody>
@@ -8699,28 +8705,30 @@
           <p:cNvPr id="20" name="">
             <a:extLst xmlns:a="http://schemas.openxmlformats.org/drawingml/2006/main">
               <a:ext uri="{FF2B5EF4-FFF2-40B4-BE49-F238E27FC236}">
-                <a16:creationId xmlns:a16="http://schemas.microsoft.com/office/drawing/2014/main" id="{6510FE78-63BE-4A89-B2C5-D01842B24A44}"/>
-              </a:ext>
-            </a:extLst>
-          </p:cNvPr>
-          <p:cNvSpPr>
-            <a:spLocks xmlns:a="http://schemas.openxmlformats.org/drawingml/2006/main" noGrp="1"/>
-          </p:cNvSpPr>
-          <p:nvPr/>
-        </p:nvSpPr>
-        <p:spPr>
-          <a:xfrm xmlns:a="http://schemas.openxmlformats.org/drawingml/2006/main">
-            <a:off x="1000125" y="4476750"/>
-            <a:ext cx="476250" cy="476250"/>
-          </a:xfrm>
-          <a:prstGeom xmlns:a="http://schemas.openxmlformats.org/drawingml/2006/main" prst="ellipse">
+                <a16:creationId xmlns:a16="http://schemas.microsoft.com/office/drawing/2014/main" id="{BBEF5536-FEBC-42B1-9C80-4A9469BE4834}"/>
+              </a:ext>
+            </a:extLst>
+          </p:cNvPr>
+          <p:cNvSpPr>
+            <a:spLocks xmlns:a="http://schemas.openxmlformats.org/drawingml/2006/main" noGrp="1"/>
+          </p:cNvSpPr>
+          <p:nvPr/>
+        </p:nvSpPr>
+        <p:spPr>
+          <a:xfrm xmlns:a="http://schemas.openxmlformats.org/drawingml/2006/main">
+            <a:off x="1714500" y="4695825"/>
+            <a:ext cx="9334500" cy="9525"/>
+          </a:xfrm>
+          <a:prstGeom xmlns:a="http://schemas.openxmlformats.org/drawingml/2006/main" prst="rect">
             <a:avLst/>
           </a:prstGeom>
           <a:solidFill xmlns:a="http://schemas.openxmlformats.org/drawingml/2006/main">
-            <a:srgbClr val="2C6E73"/>
+            <a:srgbClr val="D9E0E6"/>
           </a:solidFill>
           <a:ln xmlns:a="http://schemas.openxmlformats.org/drawingml/2006/main" w="0">
-            <a:noFill/>
+            <a:solidFill>
+              <a:srgbClr val="D9E0E6"/>
+            </a:solidFill>
           </a:ln>
         </p:spPr>
       </p:sp>
@@ -8729,19 +8737,19 @@
           <p:cNvPr id="21" name="">
             <a:extLst xmlns:a="http://schemas.openxmlformats.org/drawingml/2006/main">
               <a:ext uri="{FF2B5EF4-FFF2-40B4-BE49-F238E27FC236}">
-                <a16:creationId xmlns:a16="http://schemas.microsoft.com/office/drawing/2014/main" id="{E0599D19-F778-478C-BCCA-9C54A813D326}"/>
-              </a:ext>
-            </a:extLst>
-          </p:cNvPr>
-          <p:cNvSpPr>
-            <a:spLocks xmlns:a="http://schemas.openxmlformats.org/drawingml/2006/main" noGrp="1"/>
-          </p:cNvSpPr>
-          <p:nvPr/>
-        </p:nvSpPr>
-        <p:spPr>
-          <a:xfrm xmlns:a="http://schemas.openxmlformats.org/drawingml/2006/main">
-            <a:off x="1000125" y="4505325"/>
-            <a:ext cx="476250" cy="419100"/>
+                <a16:creationId xmlns:a16="http://schemas.microsoft.com/office/drawing/2014/main" id="{6649797C-4A21-45FB-9AD9-4ECFCCCE3FC3}"/>
+              </a:ext>
+            </a:extLst>
+          </p:cNvPr>
+          <p:cNvSpPr>
+            <a:spLocks xmlns:a="http://schemas.openxmlformats.org/drawingml/2006/main" noGrp="1"/>
+          </p:cNvSpPr>
+          <p:nvPr/>
+        </p:nvSpPr>
+        <p:spPr>
+          <a:xfrm xmlns:a="http://schemas.openxmlformats.org/drawingml/2006/main">
+            <a:off x="1162050" y="4829175"/>
+            <a:ext cx="400050" cy="400050"/>
           </a:xfrm>
           <a:prstGeom xmlns:a="http://schemas.openxmlformats.org/drawingml/2006/main" prst="rect">
             <a:avLst/>
@@ -8758,9 +8766,9 @@
           <a:lstStyle xmlns:a="http://schemas.openxmlformats.org/drawingml/2006/main"/>
           <a:p xmlns:a="http://schemas.openxmlformats.org/drawingml/2006/main">
             <a:pPr algn="ctr">
-              <a:defRPr sz="1350" b="1">
-                <a:solidFill>
-                  <a:srgbClr val="FFFFFF"/>
+              <a:defRPr sz="1125" b="1">
+                <a:solidFill>
+                  <a:srgbClr val="2F785D"/>
                 </a:solidFill>
                 <a:latin typeface="Arial"/>
                 <a:ea typeface="Arial"/>
@@ -8768,9 +8776,9 @@
               </a:defRPr>
             </a:pPr>
             <a:r>
-              <a:rPr sz="1350" b="1">
-                <a:solidFill>
-                  <a:srgbClr val="FFFFFF"/>
+              <a:rPr sz="1125" b="1">
+                <a:solidFill>
+                  <a:srgbClr val="2F785D"/>
                 </a:solidFill>
                 <a:latin typeface="Arial"/>
                 <a:ea typeface="Arial"/>
@@ -8786,19 +8794,19 @@
           <p:cNvPr id="22" name="">
             <a:extLst xmlns:a="http://schemas.openxmlformats.org/drawingml/2006/main">
               <a:ext uri="{FF2B5EF4-FFF2-40B4-BE49-F238E27FC236}">
-                <a16:creationId xmlns:a16="http://schemas.microsoft.com/office/drawing/2014/main" id="{5E91BE2F-46FC-4BA6-8A48-8D0DC2B70DCE}"/>
-              </a:ext>
-            </a:extLst>
-          </p:cNvPr>
-          <p:cNvSpPr>
-            <a:spLocks xmlns:a="http://schemas.openxmlformats.org/drawingml/2006/main" noGrp="1"/>
-          </p:cNvSpPr>
-          <p:nvPr/>
-        </p:nvSpPr>
-        <p:spPr>
-          <a:xfrm xmlns:a="http://schemas.openxmlformats.org/drawingml/2006/main">
-            <a:off x="1714500" y="4410075"/>
-            <a:ext cx="9429750" cy="609600"/>
+                <a16:creationId xmlns:a16="http://schemas.microsoft.com/office/drawing/2014/main" id="{66B47FA6-4F12-45EF-B7DF-F1CA0F33F9AE}"/>
+              </a:ext>
+            </a:extLst>
+          </p:cNvPr>
+          <p:cNvSpPr>
+            <a:spLocks xmlns:a="http://schemas.openxmlformats.org/drawingml/2006/main" noGrp="1"/>
+          </p:cNvSpPr>
+          <p:nvPr/>
+        </p:nvSpPr>
+        <p:spPr>
+          <a:xfrm xmlns:a="http://schemas.openxmlformats.org/drawingml/2006/main">
+            <a:off x="1714500" y="4743450"/>
+            <a:ext cx="9525000" cy="809625"/>
           </a:xfrm>
           <a:prstGeom xmlns:a="http://schemas.openxmlformats.org/drawingml/2006/main" prst="rect">
             <a:avLst/>
@@ -8815,7 +8823,7 @@
           <a:lstStyle xmlns:a="http://schemas.openxmlformats.org/drawingml/2006/main"/>
           <a:p xmlns:a="http://schemas.openxmlformats.org/drawingml/2006/main">
             <a:pPr algn="l">
-              <a:defRPr sz="1500" b="1">
+              <a:defRPr sz="1725" b="1">
                 <a:solidFill>
                   <a:srgbClr val="2F785D"/>
                 </a:solidFill>
@@ -8825,7 +8833,7 @@
               </a:defRPr>
             </a:pPr>
             <a:r>
-              <a:rPr sz="1500" b="1">
+              <a:rPr sz="1725" b="1">
                 <a:solidFill>
                   <a:srgbClr val="2F785D"/>
                 </a:solidFill>
@@ -8833,7 +8841,7 @@
                 <a:ea typeface="Arial"/>
                 <a:cs typeface="Arial"/>
               </a:rPr>
-              <a:t>Check the result: Use cubic units and compare the result with an estimate.</a:t>
+              <a:t>120 cubic units</a:t>
             </a:r>
           </a:p>
         </p:txBody>
@@ -8841,7 +8849,7 @@
     </p:spTree>
     <p:extLst>
       <p:ext uri="{BB962C8B-B14F-4D97-AF65-F5344CB8AC3E}">
-        <p14:creationId xmlns:p14="http://schemas.microsoft.com/office/powerpoint/2010/main" val="1231511503"/>
+        <p14:creationId xmlns:p14="http://schemas.microsoft.com/office/powerpoint/2010/main" val="2117014056"/>
       </p:ext>
     </p:extLst>
   </p:cSld>
@@ -9134,7 +9142,7 @@
           <p:cNvPr id="15" name="">
             <a:extLst xmlns:a="http://schemas.openxmlformats.org/drawingml/2006/main">
               <a:ext uri="{FF2B5EF4-FFF2-40B4-BE49-F238E27FC236}">
-                <a16:creationId xmlns:a16="http://schemas.microsoft.com/office/drawing/2014/main" id="{D42F7C2C-CF1A-4CE4-98A2-FB0050997983}"/>
+                <a16:creationId xmlns:a16="http://schemas.microsoft.com/office/drawing/2014/main" id="{304B22F7-1AEB-4ABE-8651-D275BC3CB144}"/>
               </a:ext>
             </a:extLst>
           </p:cNvPr>
@@ -9166,7 +9174,7 @@
           <p:cNvPr id="2" name="">
             <a:extLst xmlns:a="http://schemas.openxmlformats.org/drawingml/2006/main">
               <a:ext uri="{FF2B5EF4-FFF2-40B4-BE49-F238E27FC236}">
-                <a16:creationId xmlns:a16="http://schemas.microsoft.com/office/drawing/2014/main" id="{7044C47C-299B-4ABA-A9F7-7D91CC025479}"/>
+                <a16:creationId xmlns:a16="http://schemas.microsoft.com/office/drawing/2014/main" id="{350DE1DB-504E-496E-8F69-DED9E19419A8}"/>
               </a:ext>
             </a:extLst>
           </p:cNvPr>
@@ -9223,7 +9231,7 @@
           <p:cNvPr id="3" name="">
             <a:extLst xmlns:a="http://schemas.openxmlformats.org/drawingml/2006/main">
               <a:ext uri="{FF2B5EF4-FFF2-40B4-BE49-F238E27FC236}">
-                <a16:creationId xmlns:a16="http://schemas.microsoft.com/office/drawing/2014/main" id="{A98D7846-9072-4F1C-95F3-2477B532CA99}"/>
+                <a16:creationId xmlns:a16="http://schemas.microsoft.com/office/drawing/2014/main" id="{48F4F2F1-3DD5-4C90-B480-5365B73882F3}"/>
               </a:ext>
             </a:extLst>
           </p:cNvPr>
@@ -9255,7 +9263,7 @@
           <p:cNvPr id="4" name="">
             <a:extLst xmlns:a="http://schemas.openxmlformats.org/drawingml/2006/main">
               <a:ext uri="{FF2B5EF4-FFF2-40B4-BE49-F238E27FC236}">
-                <a16:creationId xmlns:a16="http://schemas.microsoft.com/office/drawing/2014/main" id="{258FFC37-6B28-40D5-A6EF-D1E167C7BF73}"/>
+                <a16:creationId xmlns:a16="http://schemas.microsoft.com/office/drawing/2014/main" id="{C251A28B-2473-4E6F-A517-1C490E5286F9}"/>
               </a:ext>
             </a:extLst>
           </p:cNvPr>
@@ -9312,7 +9320,7 @@
           <p:cNvPr id="5" name="">
             <a:extLst xmlns:a="http://schemas.openxmlformats.org/drawingml/2006/main">
               <a:ext uri="{FF2B5EF4-FFF2-40B4-BE49-F238E27FC236}">
-                <a16:creationId xmlns:a16="http://schemas.microsoft.com/office/drawing/2014/main" id="{FFB47ADD-8DBA-4C7C-809F-88591D08F00D}"/>
+                <a16:creationId xmlns:a16="http://schemas.microsoft.com/office/drawing/2014/main" id="{A92B15BA-0B73-4A9E-9801-8FC53B68534C}"/>
               </a:ext>
             </a:extLst>
           </p:cNvPr>
@@ -9369,7 +9377,7 @@
           <p:cNvPr id="6" name="">
             <a:extLst xmlns:a="http://schemas.openxmlformats.org/drawingml/2006/main">
               <a:ext uri="{FF2B5EF4-FFF2-40B4-BE49-F238E27FC236}">
-                <a16:creationId xmlns:a16="http://schemas.microsoft.com/office/drawing/2014/main" id="{A9DB43EF-9DBE-4889-9D56-6BB6BD60EE65}"/>
+                <a16:creationId xmlns:a16="http://schemas.microsoft.com/office/drawing/2014/main" id="{E38ECE4D-9F45-4226-923B-A0343D3D0A79}"/>
               </a:ext>
             </a:extLst>
           </p:cNvPr>
@@ -9426,7 +9434,7 @@
           <p:cNvPr id="7" name="">
             <a:extLst xmlns:a="http://schemas.openxmlformats.org/drawingml/2006/main">
               <a:ext uri="{FF2B5EF4-FFF2-40B4-BE49-F238E27FC236}">
-                <a16:creationId xmlns:a16="http://schemas.microsoft.com/office/drawing/2014/main" id="{F4C26A95-1F37-4459-9E89-56272AC4B0FC}"/>
+                <a16:creationId xmlns:a16="http://schemas.microsoft.com/office/drawing/2014/main" id="{0D250448-AA71-4CD1-9D8E-396CAC1553B6}"/>
               </a:ext>
             </a:extLst>
           </p:cNvPr>
@@ -9458,7 +9466,7 @@
           <p:cNvPr id="8" name="">
             <a:extLst xmlns:a="http://schemas.openxmlformats.org/drawingml/2006/main">
               <a:ext uri="{FF2B5EF4-FFF2-40B4-BE49-F238E27FC236}">
-                <a16:creationId xmlns:a16="http://schemas.microsoft.com/office/drawing/2014/main" id="{475E4D32-3EE2-4BC1-8DD8-08466D26D80D}"/>
+                <a16:creationId xmlns:a16="http://schemas.microsoft.com/office/drawing/2014/main" id="{2927DE0C-0FB4-4253-BD79-F87BF74A6613}"/>
               </a:ext>
             </a:extLst>
           </p:cNvPr>
@@ -9515,7 +9523,7 @@
           <p:cNvPr id="9" name="">
             <a:extLst xmlns:a="http://schemas.openxmlformats.org/drawingml/2006/main">
               <a:ext uri="{FF2B5EF4-FFF2-40B4-BE49-F238E27FC236}">
-                <a16:creationId xmlns:a16="http://schemas.microsoft.com/office/drawing/2014/main" id="{EA0593F6-30B1-4BDA-B334-2F7EEB240A7A}"/>
+                <a16:creationId xmlns:a16="http://schemas.microsoft.com/office/drawing/2014/main" id="{EDD6FF47-0A4D-4C93-BFE1-A862ABC1D876}"/>
               </a:ext>
             </a:extLst>
           </p:cNvPr>
@@ -9572,7 +9580,7 @@
           <p:cNvPr id="10" name="">
             <a:extLst xmlns:a="http://schemas.openxmlformats.org/drawingml/2006/main">
               <a:ext uri="{FF2B5EF4-FFF2-40B4-BE49-F238E27FC236}">
-                <a16:creationId xmlns:a16="http://schemas.microsoft.com/office/drawing/2014/main" id="{764FC33B-DF15-468D-8938-2357F219F882}"/>
+                <a16:creationId xmlns:a16="http://schemas.microsoft.com/office/drawing/2014/main" id="{2FDABA89-F29C-4C29-93A2-B467BA971CA7}"/>
               </a:ext>
             </a:extLst>
           </p:cNvPr>
@@ -9629,7 +9637,7 @@
           <p:cNvPr id="11" name="">
             <a:extLst xmlns:a="http://schemas.openxmlformats.org/drawingml/2006/main">
               <a:ext uri="{FF2B5EF4-FFF2-40B4-BE49-F238E27FC236}">
-                <a16:creationId xmlns:a16="http://schemas.microsoft.com/office/drawing/2014/main" id="{07C444DE-BCAA-48F8-8BEB-CF1F995FFCCA}"/>
+                <a16:creationId xmlns:a16="http://schemas.microsoft.com/office/drawing/2014/main" id="{276C8BD9-99D2-4BE3-B59B-9CB51C84AC7F}"/>
               </a:ext>
             </a:extLst>
           </p:cNvPr>
@@ -9686,7 +9694,7 @@
           <p:cNvPr id="12" name="">
             <a:extLst xmlns:a="http://schemas.openxmlformats.org/drawingml/2006/main">
               <a:ext uri="{FF2B5EF4-FFF2-40B4-BE49-F238E27FC236}">
-                <a16:creationId xmlns:a16="http://schemas.microsoft.com/office/drawing/2014/main" id="{FA8AAD18-E033-42CA-9124-1558A43EC2D1}"/>
+                <a16:creationId xmlns:a16="http://schemas.microsoft.com/office/drawing/2014/main" id="{EF9A9789-E629-4153-823D-607B3E7F9293}"/>
               </a:ext>
             </a:extLst>
           </p:cNvPr>
@@ -9718,7 +9726,7 @@
           <p:cNvPr id="13" name="">
             <a:extLst xmlns:a="http://schemas.openxmlformats.org/drawingml/2006/main">
               <a:ext uri="{FF2B5EF4-FFF2-40B4-BE49-F238E27FC236}">
-                <a16:creationId xmlns:a16="http://schemas.microsoft.com/office/drawing/2014/main" id="{89F99065-6FAE-4A09-886C-A2131A1B4E4C}"/>
+                <a16:creationId xmlns:a16="http://schemas.microsoft.com/office/drawing/2014/main" id="{885E3E9B-96CC-473E-8B8D-9E7CC61806E9}"/>
               </a:ext>
             </a:extLst>
           </p:cNvPr>
@@ -9775,7 +9783,7 @@
           <p:cNvPr id="14" name="">
             <a:extLst xmlns:a="http://schemas.openxmlformats.org/drawingml/2006/main">
               <a:ext uri="{FF2B5EF4-FFF2-40B4-BE49-F238E27FC236}">
-                <a16:creationId xmlns:a16="http://schemas.microsoft.com/office/drawing/2014/main" id="{DE667424-D9AD-4386-99C1-68142343C410}"/>
+                <a16:creationId xmlns:a16="http://schemas.microsoft.com/office/drawing/2014/main" id="{0BF08189-E962-41BF-A5DA-9EEA84AF5D04}"/>
               </a:ext>
             </a:extLst>
           </p:cNvPr>
@@ -9830,7 +9838,7 @@
     </p:spTree>
     <p:extLst>
       <p:ext uri="{BB962C8B-B14F-4D97-AF65-F5344CB8AC3E}">
-        <p14:creationId xmlns:p14="http://schemas.microsoft.com/office/powerpoint/2010/main" val="2144394802"/>
+        <p14:creationId xmlns:p14="http://schemas.microsoft.com/office/powerpoint/2010/main" val="1320654889"/>
       </p:ext>
     </p:extLst>
   </p:cSld>
@@ -10031,7 +10039,7 @@
           <p:cNvPr id="16" name="">
             <a:extLst xmlns:a="http://schemas.openxmlformats.org/drawingml/2006/main">
               <a:ext uri="{FF2B5EF4-FFF2-40B4-BE49-F238E27FC236}">
-                <a16:creationId xmlns:a16="http://schemas.microsoft.com/office/drawing/2014/main" id="{6E787FB8-E859-4726-8EF5-98725C49D16D}"/>
+                <a16:creationId xmlns:a16="http://schemas.microsoft.com/office/drawing/2014/main" id="{585BBA50-2791-402E-9FC1-70B209CAC675}"/>
               </a:ext>
             </a:extLst>
           </p:cNvPr>
@@ -10063,7 +10071,7 @@
           <p:cNvPr id="2" name="">
             <a:extLst xmlns:a="http://schemas.openxmlformats.org/drawingml/2006/main">
               <a:ext uri="{FF2B5EF4-FFF2-40B4-BE49-F238E27FC236}">
-                <a16:creationId xmlns:a16="http://schemas.microsoft.com/office/drawing/2014/main" id="{6921A74F-916A-4C77-A62E-6A87168C80A8}"/>
+                <a16:creationId xmlns:a16="http://schemas.microsoft.com/office/drawing/2014/main" id="{EF0FBB0D-003E-47A4-86CF-2E882E864137}"/>
               </a:ext>
             </a:extLst>
           </p:cNvPr>
@@ -10120,7 +10128,7 @@
           <p:cNvPr id="3" name="">
             <a:extLst xmlns:a="http://schemas.openxmlformats.org/drawingml/2006/main">
               <a:ext uri="{FF2B5EF4-FFF2-40B4-BE49-F238E27FC236}">
-                <a16:creationId xmlns:a16="http://schemas.microsoft.com/office/drawing/2014/main" id="{9AAC185C-E749-4539-A782-0D9FEA931B92}"/>
+                <a16:creationId xmlns:a16="http://schemas.microsoft.com/office/drawing/2014/main" id="{FEF627A5-E517-4DD5-A2F5-F485842995DA}"/>
               </a:ext>
             </a:extLst>
           </p:cNvPr>
@@ -10152,7 +10160,7 @@
           <p:cNvPr id="4" name="">
             <a:extLst xmlns:a="http://schemas.openxmlformats.org/drawingml/2006/main">
               <a:ext uri="{FF2B5EF4-FFF2-40B4-BE49-F238E27FC236}">
-                <a16:creationId xmlns:a16="http://schemas.microsoft.com/office/drawing/2014/main" id="{7F1554D8-8438-4FDC-96FE-DFC26E237C9C}"/>
+                <a16:creationId xmlns:a16="http://schemas.microsoft.com/office/drawing/2014/main" id="{D759C54E-A849-4DA2-B331-F090920B987E}"/>
               </a:ext>
             </a:extLst>
           </p:cNvPr>
@@ -10209,7 +10217,7 @@
           <p:cNvPr id="5" name="">
             <a:extLst xmlns:a="http://schemas.openxmlformats.org/drawingml/2006/main">
               <a:ext uri="{FF2B5EF4-FFF2-40B4-BE49-F238E27FC236}">
-                <a16:creationId xmlns:a16="http://schemas.microsoft.com/office/drawing/2014/main" id="{1A27DFED-4005-4BDF-B8C9-AFE954A7FA7B}"/>
+                <a16:creationId xmlns:a16="http://schemas.microsoft.com/office/drawing/2014/main" id="{05BD60C8-3F10-4B7A-A2C3-6A228ED01642}"/>
               </a:ext>
             </a:extLst>
           </p:cNvPr>
@@ -10266,7 +10274,7 @@
           <p:cNvPr id="6" name="">
             <a:extLst xmlns:a="http://schemas.openxmlformats.org/drawingml/2006/main">
               <a:ext uri="{FF2B5EF4-FFF2-40B4-BE49-F238E27FC236}">
-                <a16:creationId xmlns:a16="http://schemas.microsoft.com/office/drawing/2014/main" id="{8308A6E5-D58F-4ABA-ADAE-76B6D0313F81}"/>
+                <a16:creationId xmlns:a16="http://schemas.microsoft.com/office/drawing/2014/main" id="{0B5E1856-5FB7-4E65-B63A-7AC17E2B44B0}"/>
               </a:ext>
             </a:extLst>
           </p:cNvPr>
@@ -10323,7 +10331,7 @@
           <p:cNvPr id="7" name="">
             <a:extLst xmlns:a="http://schemas.openxmlformats.org/drawingml/2006/main">
               <a:ext uri="{FF2B5EF4-FFF2-40B4-BE49-F238E27FC236}">
-                <a16:creationId xmlns:a16="http://schemas.microsoft.com/office/drawing/2014/main" id="{1085EEEE-A182-4895-8B13-91B6F3A98E89}"/>
+                <a16:creationId xmlns:a16="http://schemas.microsoft.com/office/drawing/2014/main" id="{184CEA59-63EF-4ECC-8805-4942F4C498A7}"/>
               </a:ext>
             </a:extLst>
           </p:cNvPr>
@@ -10355,7 +10363,7 @@
           <p:cNvPr id="8" name="">
             <a:extLst xmlns:a="http://schemas.openxmlformats.org/drawingml/2006/main">
               <a:ext uri="{FF2B5EF4-FFF2-40B4-BE49-F238E27FC236}">
-                <a16:creationId xmlns:a16="http://schemas.microsoft.com/office/drawing/2014/main" id="{9530BE94-EB46-4859-9281-158731ED47A5}"/>
+                <a16:creationId xmlns:a16="http://schemas.microsoft.com/office/drawing/2014/main" id="{EDAE1996-C865-4EDD-B75A-FF38B5805774}"/>
               </a:ext>
             </a:extLst>
           </p:cNvPr>
@@ -10412,7 +10420,7 @@
           <p:cNvPr id="9" name="">
             <a:extLst xmlns:a="http://schemas.openxmlformats.org/drawingml/2006/main">
               <a:ext uri="{FF2B5EF4-FFF2-40B4-BE49-F238E27FC236}">
-                <a16:creationId xmlns:a16="http://schemas.microsoft.com/office/drawing/2014/main" id="{E4FA6391-AAFD-4BCF-9914-461670B7C567}"/>
+                <a16:creationId xmlns:a16="http://schemas.microsoft.com/office/drawing/2014/main" id="{516C965D-E4D2-4F7D-AF78-EB302EDAB251}"/>
               </a:ext>
             </a:extLst>
           </p:cNvPr>
@@ -10469,7 +10477,7 @@
           <p:cNvPr id="10" name="">
             <a:extLst xmlns:a="http://schemas.openxmlformats.org/drawingml/2006/main">
               <a:ext uri="{FF2B5EF4-FFF2-40B4-BE49-F238E27FC236}">
-                <a16:creationId xmlns:a16="http://schemas.microsoft.com/office/drawing/2014/main" id="{4C234D7B-09AF-4D6A-A0DA-AF7B23F3A7BA}"/>
+                <a16:creationId xmlns:a16="http://schemas.microsoft.com/office/drawing/2014/main" id="{71988743-FA13-41B9-B3B9-58CF1D2A3145}"/>
               </a:ext>
             </a:extLst>
           </p:cNvPr>
@@ -10526,7 +10534,7 @@
           <p:cNvPr id="11" name="">
             <a:extLst xmlns:a="http://schemas.openxmlformats.org/drawingml/2006/main">
               <a:ext uri="{FF2B5EF4-FFF2-40B4-BE49-F238E27FC236}">
-                <a16:creationId xmlns:a16="http://schemas.microsoft.com/office/drawing/2014/main" id="{FB18350F-6078-4FD0-A65F-BB58F1328F55}"/>
+                <a16:creationId xmlns:a16="http://schemas.microsoft.com/office/drawing/2014/main" id="{9377A3E0-9C13-479D-8F41-62BD5BB0DD33}"/>
               </a:ext>
             </a:extLst>
           </p:cNvPr>
@@ -10583,7 +10591,7 @@
           <p:cNvPr id="12" name="">
             <a:extLst xmlns:a="http://schemas.openxmlformats.org/drawingml/2006/main">
               <a:ext uri="{FF2B5EF4-FFF2-40B4-BE49-F238E27FC236}">
-                <a16:creationId xmlns:a16="http://schemas.microsoft.com/office/drawing/2014/main" id="{9AA19CDF-4BE0-430C-A187-9FCB80BA9204}"/>
+                <a16:creationId xmlns:a16="http://schemas.microsoft.com/office/drawing/2014/main" id="{DDD2264A-162F-44DF-98C3-40999A94135B}"/>
               </a:ext>
             </a:extLst>
           </p:cNvPr>
@@ -10640,7 +10648,7 @@
           <p:cNvPr id="13" name="">
             <a:extLst xmlns:a="http://schemas.openxmlformats.org/drawingml/2006/main">
               <a:ext uri="{FF2B5EF4-FFF2-40B4-BE49-F238E27FC236}">
-                <a16:creationId xmlns:a16="http://schemas.microsoft.com/office/drawing/2014/main" id="{3D19C877-7B61-47B9-BC3F-0C4C3F5B2B35}"/>
+                <a16:creationId xmlns:a16="http://schemas.microsoft.com/office/drawing/2014/main" id="{1543CF15-FAC0-4294-9C61-D083B7265F84}"/>
               </a:ext>
             </a:extLst>
           </p:cNvPr>
@@ -10697,7 +10705,7 @@
           <p:cNvPr id="14" name="">
             <a:extLst xmlns:a="http://schemas.openxmlformats.org/drawingml/2006/main">
               <a:ext uri="{FF2B5EF4-FFF2-40B4-BE49-F238E27FC236}">
-                <a16:creationId xmlns:a16="http://schemas.microsoft.com/office/drawing/2014/main" id="{9CFAE9CA-7030-4B5B-89F1-E495615DE6EB}"/>
+                <a16:creationId xmlns:a16="http://schemas.microsoft.com/office/drawing/2014/main" id="{94DAC2AA-316F-471E-AB03-BD9AE73F43C9}"/>
               </a:ext>
             </a:extLst>
           </p:cNvPr>
@@ -10754,7 +10762,7 @@
           <p:cNvPr id="15" name="">
             <a:extLst xmlns:a="http://schemas.openxmlformats.org/drawingml/2006/main">
               <a:ext uri="{FF2B5EF4-FFF2-40B4-BE49-F238E27FC236}">
-                <a16:creationId xmlns:a16="http://schemas.microsoft.com/office/drawing/2014/main" id="{C19B4AFC-BB73-4F88-886E-9048D8CC9001}"/>
+                <a16:creationId xmlns:a16="http://schemas.microsoft.com/office/drawing/2014/main" id="{8112984B-AD2D-415A-9EBF-E661787DD159}"/>
               </a:ext>
             </a:extLst>
           </p:cNvPr>
@@ -10809,7 +10817,7 @@
     </p:spTree>
     <p:extLst>
       <p:ext uri="{BB962C8B-B14F-4D97-AF65-F5344CB8AC3E}">
-        <p14:creationId xmlns:p14="http://schemas.microsoft.com/office/powerpoint/2010/main" val="1313795313"/>
+        <p14:creationId xmlns:p14="http://schemas.microsoft.com/office/powerpoint/2010/main" val="982024723"/>
       </p:ext>
     </p:extLst>
   </p:cSld>
@@ -10964,7 +10972,7 @@
           <p:cNvPr id="16" name="">
             <a:extLst xmlns:a="http://schemas.openxmlformats.org/drawingml/2006/main">
               <a:ext uri="{FF2B5EF4-FFF2-40B4-BE49-F238E27FC236}">
-                <a16:creationId xmlns:a16="http://schemas.microsoft.com/office/drawing/2014/main" id="{4A643EFF-32D1-4242-BC0D-7BAFD97DBC2C}"/>
+                <a16:creationId xmlns:a16="http://schemas.microsoft.com/office/drawing/2014/main" id="{A750F13D-154A-49DB-9F10-BCE7F0D7AAC0}"/>
               </a:ext>
             </a:extLst>
           </p:cNvPr>
@@ -10996,7 +11004,7 @@
           <p:cNvPr id="2" name="">
             <a:extLst xmlns:a="http://schemas.openxmlformats.org/drawingml/2006/main">
               <a:ext uri="{FF2B5EF4-FFF2-40B4-BE49-F238E27FC236}">
-                <a16:creationId xmlns:a16="http://schemas.microsoft.com/office/drawing/2014/main" id="{67657CB0-1014-4053-AF26-2C0F74EECB49}"/>
+                <a16:creationId xmlns:a16="http://schemas.microsoft.com/office/drawing/2014/main" id="{065AEA4C-942A-49BE-AD1B-A163744A36AE}"/>
               </a:ext>
             </a:extLst>
           </p:cNvPr>
@@ -11053,7 +11061,7 @@
           <p:cNvPr id="3" name="">
             <a:extLst xmlns:a="http://schemas.openxmlformats.org/drawingml/2006/main">
               <a:ext uri="{FF2B5EF4-FFF2-40B4-BE49-F238E27FC236}">
-                <a16:creationId xmlns:a16="http://schemas.microsoft.com/office/drawing/2014/main" id="{90652D3E-F127-4F3C-BD23-C1E34352E70A}"/>
+                <a16:creationId xmlns:a16="http://schemas.microsoft.com/office/drawing/2014/main" id="{8C89FED5-30BE-447F-92F1-B535AEF3FD33}"/>
               </a:ext>
             </a:extLst>
           </p:cNvPr>
@@ -11085,7 +11093,7 @@
           <p:cNvPr id="4" name="">
             <a:extLst xmlns:a="http://schemas.openxmlformats.org/drawingml/2006/main">
               <a:ext uri="{FF2B5EF4-FFF2-40B4-BE49-F238E27FC236}">
-                <a16:creationId xmlns:a16="http://schemas.microsoft.com/office/drawing/2014/main" id="{6DF94E38-E0E5-417B-AD70-D4E1CA8AC019}"/>
+                <a16:creationId xmlns:a16="http://schemas.microsoft.com/office/drawing/2014/main" id="{D27AAC7B-F181-474A-A8EB-10588976B011}"/>
               </a:ext>
             </a:extLst>
           </p:cNvPr>
@@ -11142,7 +11150,7 @@
           <p:cNvPr id="5" name="">
             <a:extLst xmlns:a="http://schemas.openxmlformats.org/drawingml/2006/main">
               <a:ext uri="{FF2B5EF4-FFF2-40B4-BE49-F238E27FC236}">
-                <a16:creationId xmlns:a16="http://schemas.microsoft.com/office/drawing/2014/main" id="{88E4D453-3363-4CD5-94E8-4C6DCA4C3A36}"/>
+                <a16:creationId xmlns:a16="http://schemas.microsoft.com/office/drawing/2014/main" id="{4D497190-FAEF-4261-83FF-3FCE2943FB04}"/>
               </a:ext>
             </a:extLst>
           </p:cNvPr>
@@ -11199,7 +11207,7 @@
           <p:cNvPr id="6" name="">
             <a:extLst xmlns:a="http://schemas.openxmlformats.org/drawingml/2006/main">
               <a:ext uri="{FF2B5EF4-FFF2-40B4-BE49-F238E27FC236}">
-                <a16:creationId xmlns:a16="http://schemas.microsoft.com/office/drawing/2014/main" id="{1AE4861F-01A9-4338-8CE6-542F842AA166}"/>
+                <a16:creationId xmlns:a16="http://schemas.microsoft.com/office/drawing/2014/main" id="{A74FF1C6-2576-4D7C-AAB0-ABA8C4FA231B}"/>
               </a:ext>
             </a:extLst>
           </p:cNvPr>
@@ -11256,7 +11264,7 @@
           <p:cNvPr id="7" name="">
             <a:extLst xmlns:a="http://schemas.openxmlformats.org/drawingml/2006/main">
               <a:ext uri="{FF2B5EF4-FFF2-40B4-BE49-F238E27FC236}">
-                <a16:creationId xmlns:a16="http://schemas.microsoft.com/office/drawing/2014/main" id="{D1BE48C0-D9DC-4CE7-910B-5639A7E2751B}"/>
+                <a16:creationId xmlns:a16="http://schemas.microsoft.com/office/drawing/2014/main" id="{BDA3AA72-DFD8-430F-A82E-0B0486AC07F0}"/>
               </a:ext>
             </a:extLst>
           </p:cNvPr>
@@ -11288,7 +11296,7 @@
           <p:cNvPr id="8" name="">
             <a:extLst xmlns:a="http://schemas.openxmlformats.org/drawingml/2006/main">
               <a:ext uri="{FF2B5EF4-FFF2-40B4-BE49-F238E27FC236}">
-                <a16:creationId xmlns:a16="http://schemas.microsoft.com/office/drawing/2014/main" id="{A0FE2AAC-B2D8-43E4-A0B5-DC0A3BA6F552}"/>
+                <a16:creationId xmlns:a16="http://schemas.microsoft.com/office/drawing/2014/main" id="{9FCCE61E-0D4B-450D-99EF-AF26850BF28B}"/>
               </a:ext>
             </a:extLst>
           </p:cNvPr>
@@ -11345,7 +11353,7 @@
           <p:cNvPr id="9" name="">
             <a:extLst xmlns:a="http://schemas.openxmlformats.org/drawingml/2006/main">
               <a:ext uri="{FF2B5EF4-FFF2-40B4-BE49-F238E27FC236}">
-                <a16:creationId xmlns:a16="http://schemas.microsoft.com/office/drawing/2014/main" id="{E909EFCA-7EE2-4344-950A-D96BB3B8D9C5}"/>
+                <a16:creationId xmlns:a16="http://schemas.microsoft.com/office/drawing/2014/main" id="{E4086BF0-28F2-4413-88B7-3BE58DB50371}"/>
               </a:ext>
             </a:extLst>
           </p:cNvPr>
@@ -11406,7 +11414,7 @@
           <p:nvPr/>
         </p:nvPicPr>
         <p:blipFill>
-          <a:blip xmlns:r="http://schemas.openxmlformats.org/officeDocument/2006/relationships" xmlns:a="http://schemas.openxmlformats.org/drawingml/2006/main" r:embed="R84e51f54fcee4a2d"/>
+          <a:blip xmlns:r="http://schemas.openxmlformats.org/officeDocument/2006/relationships" xmlns:a="http://schemas.openxmlformats.org/drawingml/2006/main" r:embed="R85086563734f4d95"/>
           <a:stretch xmlns:a="http://schemas.openxmlformats.org/drawingml/2006/main"/>
         </p:blipFill>
         <p:spPr>
@@ -11424,7 +11432,7 @@
           <p:cNvPr id="11" name="">
             <a:extLst xmlns:a="http://schemas.openxmlformats.org/drawingml/2006/main">
               <a:ext uri="{FF2B5EF4-FFF2-40B4-BE49-F238E27FC236}">
-                <a16:creationId xmlns:a16="http://schemas.microsoft.com/office/drawing/2014/main" id="{D5366A36-DD20-4845-9BD8-E1E7C2D7F6DF}"/>
+                <a16:creationId xmlns:a16="http://schemas.microsoft.com/office/drawing/2014/main" id="{898F870F-CE54-4FD1-B44A-B1CAA926E5C1}"/>
               </a:ext>
             </a:extLst>
           </p:cNvPr>
@@ -11481,7 +11489,7 @@
           <p:cNvPr id="12" name="">
             <a:extLst xmlns:a="http://schemas.openxmlformats.org/drawingml/2006/main">
               <a:ext uri="{FF2B5EF4-FFF2-40B4-BE49-F238E27FC236}">
-                <a16:creationId xmlns:a16="http://schemas.microsoft.com/office/drawing/2014/main" id="{B4B3B8F0-D6B1-4F1B-B4A8-280E9EA6B933}"/>
+                <a16:creationId xmlns:a16="http://schemas.microsoft.com/office/drawing/2014/main" id="{62C31678-3F55-4D1A-9971-AEA31AC09E3E}"/>
               </a:ext>
             </a:extLst>
           </p:cNvPr>
@@ -11538,7 +11546,7 @@
           <p:cNvPr id="13" name="">
             <a:extLst xmlns:a="http://schemas.openxmlformats.org/drawingml/2006/main">
               <a:ext uri="{FF2B5EF4-FFF2-40B4-BE49-F238E27FC236}">
-                <a16:creationId xmlns:a16="http://schemas.microsoft.com/office/drawing/2014/main" id="{09E09C3E-6905-4E9C-98EC-78E38038F8F0}"/>
+                <a16:creationId xmlns:a16="http://schemas.microsoft.com/office/drawing/2014/main" id="{F5FDFA4D-ED92-4E90-A7F2-B021332D3A9F}"/>
               </a:ext>
             </a:extLst>
           </p:cNvPr>
@@ -11570,7 +11578,7 @@
           <p:cNvPr id="14" name="">
             <a:extLst xmlns:a="http://schemas.openxmlformats.org/drawingml/2006/main">
               <a:ext uri="{FF2B5EF4-FFF2-40B4-BE49-F238E27FC236}">
-                <a16:creationId xmlns:a16="http://schemas.microsoft.com/office/drawing/2014/main" id="{35C2CED1-3DE6-408C-B23B-456F5DD73196}"/>
+                <a16:creationId xmlns:a16="http://schemas.microsoft.com/office/drawing/2014/main" id="{B468F970-96D2-49F6-B95F-894F7217270D}"/>
               </a:ext>
             </a:extLst>
           </p:cNvPr>
@@ -11627,7 +11635,7 @@
           <p:cNvPr id="15" name="">
             <a:extLst xmlns:a="http://schemas.openxmlformats.org/drawingml/2006/main">
               <a:ext uri="{FF2B5EF4-FFF2-40B4-BE49-F238E27FC236}">
-                <a16:creationId xmlns:a16="http://schemas.microsoft.com/office/drawing/2014/main" id="{9B8DE2AD-5337-4599-A709-238188082DB2}"/>
+                <a16:creationId xmlns:a16="http://schemas.microsoft.com/office/drawing/2014/main" id="{B8CF269A-C0B5-42EE-B5E3-BF70E5765DFD}"/>
               </a:ext>
             </a:extLst>
           </p:cNvPr>
@@ -11682,7 +11690,7 @@
     </p:spTree>
     <p:extLst>
       <p:ext uri="{BB962C8B-B14F-4D97-AF65-F5344CB8AC3E}">
-        <p14:creationId xmlns:p14="http://schemas.microsoft.com/office/powerpoint/2010/main" val="1335568891"/>
+        <p14:creationId xmlns:p14="http://schemas.microsoft.com/office/powerpoint/2010/main" val="1124053100"/>
       </p:ext>
     </p:extLst>
   </p:cSld>
@@ -11837,7 +11845,7 @@
           <p:cNvPr id="23" name="">
             <a:extLst xmlns:a="http://schemas.openxmlformats.org/drawingml/2006/main">
               <a:ext uri="{FF2B5EF4-FFF2-40B4-BE49-F238E27FC236}">
-                <a16:creationId xmlns:a16="http://schemas.microsoft.com/office/drawing/2014/main" id="{1618E9C2-3D7E-4BC5-84D7-FB8D198962F6}"/>
+                <a16:creationId xmlns:a16="http://schemas.microsoft.com/office/drawing/2014/main" id="{CA3A9B12-D7AF-4480-B076-E5B09D7F57F8}"/>
               </a:ext>
             </a:extLst>
           </p:cNvPr>
@@ -11869,7 +11877,7 @@
           <p:cNvPr id="2" name="">
             <a:extLst xmlns:a="http://schemas.openxmlformats.org/drawingml/2006/main">
               <a:ext uri="{FF2B5EF4-FFF2-40B4-BE49-F238E27FC236}">
-                <a16:creationId xmlns:a16="http://schemas.microsoft.com/office/drawing/2014/main" id="{4B5879E4-F71F-4879-B918-EB5F37490F15}"/>
+                <a16:creationId xmlns:a16="http://schemas.microsoft.com/office/drawing/2014/main" id="{442069C8-C406-40FD-A512-10C94B2B64E0}"/>
               </a:ext>
             </a:extLst>
           </p:cNvPr>
@@ -11926,7 +11934,7 @@
           <p:cNvPr id="3" name="">
             <a:extLst xmlns:a="http://schemas.openxmlformats.org/drawingml/2006/main">
               <a:ext uri="{FF2B5EF4-FFF2-40B4-BE49-F238E27FC236}">
-                <a16:creationId xmlns:a16="http://schemas.microsoft.com/office/drawing/2014/main" id="{D58E7D36-1E10-44ED-AB41-D6902491243C}"/>
+                <a16:creationId xmlns:a16="http://schemas.microsoft.com/office/drawing/2014/main" id="{D40F1DE7-FC68-4321-8062-B50F96BA57DD}"/>
               </a:ext>
             </a:extLst>
           </p:cNvPr>
@@ -11958,7 +11966,7 @@
           <p:cNvPr id="4" name="">
             <a:extLst xmlns:a="http://schemas.openxmlformats.org/drawingml/2006/main">
               <a:ext uri="{FF2B5EF4-FFF2-40B4-BE49-F238E27FC236}">
-                <a16:creationId xmlns:a16="http://schemas.microsoft.com/office/drawing/2014/main" id="{614E1B65-BC3A-4415-8746-8804FCD9F267}"/>
+                <a16:creationId xmlns:a16="http://schemas.microsoft.com/office/drawing/2014/main" id="{5A59BFCF-06E4-41ED-87F7-87FB7E0BC700}"/>
               </a:ext>
             </a:extLst>
           </p:cNvPr>
@@ -12015,7 +12023,7 @@
           <p:cNvPr id="5" name="">
             <a:extLst xmlns:a="http://schemas.openxmlformats.org/drawingml/2006/main">
               <a:ext uri="{FF2B5EF4-FFF2-40B4-BE49-F238E27FC236}">
-                <a16:creationId xmlns:a16="http://schemas.microsoft.com/office/drawing/2014/main" id="{88144807-E779-42A6-950C-CF80D155AB11}"/>
+                <a16:creationId xmlns:a16="http://schemas.microsoft.com/office/drawing/2014/main" id="{5A0EE33D-8422-420F-81A1-C400E5B3EDB6}"/>
               </a:ext>
             </a:extLst>
           </p:cNvPr>
@@ -12072,7 +12080,7 @@
           <p:cNvPr id="6" name="">
             <a:extLst xmlns:a="http://schemas.openxmlformats.org/drawingml/2006/main">
               <a:ext uri="{FF2B5EF4-FFF2-40B4-BE49-F238E27FC236}">
-                <a16:creationId xmlns:a16="http://schemas.microsoft.com/office/drawing/2014/main" id="{FCDCCA3A-7375-407E-9234-64B61E8409F8}"/>
+                <a16:creationId xmlns:a16="http://schemas.microsoft.com/office/drawing/2014/main" id="{C43B1580-763F-4854-B85B-7AEC664AE383}"/>
               </a:ext>
             </a:extLst>
           </p:cNvPr>
@@ -12129,7 +12137,7 @@
           <p:cNvPr id="7" name="">
             <a:extLst xmlns:a="http://schemas.openxmlformats.org/drawingml/2006/main">
               <a:ext uri="{FF2B5EF4-FFF2-40B4-BE49-F238E27FC236}">
-                <a16:creationId xmlns:a16="http://schemas.microsoft.com/office/drawing/2014/main" id="{4402269E-A828-4230-B717-5B5AE482BD3A}"/>
+                <a16:creationId xmlns:a16="http://schemas.microsoft.com/office/drawing/2014/main" id="{57EE67FA-9A0B-4D4F-85F0-480D1549911B}"/>
               </a:ext>
             </a:extLst>
           </p:cNvPr>
@@ -12161,7 +12169,7 @@
           <p:cNvPr id="8" name="">
             <a:extLst xmlns:a="http://schemas.openxmlformats.org/drawingml/2006/main">
               <a:ext uri="{FF2B5EF4-FFF2-40B4-BE49-F238E27FC236}">
-                <a16:creationId xmlns:a16="http://schemas.microsoft.com/office/drawing/2014/main" id="{1D482E4E-86C9-4956-8B4C-A595B7ECD6B7}"/>
+                <a16:creationId xmlns:a16="http://schemas.microsoft.com/office/drawing/2014/main" id="{240240CC-314B-48DA-BD24-01DDDBF43376}"/>
               </a:ext>
             </a:extLst>
           </p:cNvPr>
@@ -12218,7 +12226,7 @@
           <p:cNvPr id="9" name="">
             <a:extLst xmlns:a="http://schemas.openxmlformats.org/drawingml/2006/main">
               <a:ext uri="{FF2B5EF4-FFF2-40B4-BE49-F238E27FC236}">
-                <a16:creationId xmlns:a16="http://schemas.microsoft.com/office/drawing/2014/main" id="{33685037-9261-485C-A76F-7F7CB75B5402}"/>
+                <a16:creationId xmlns:a16="http://schemas.microsoft.com/office/drawing/2014/main" id="{BAE178C4-ECEA-493E-B5A1-D827C4F62DDC}"/>
               </a:ext>
             </a:extLst>
           </p:cNvPr>
@@ -12275,7 +12283,7 @@
           <p:cNvPr id="10" name="">
             <a:extLst xmlns:a="http://schemas.openxmlformats.org/drawingml/2006/main">
               <a:ext uri="{FF2B5EF4-FFF2-40B4-BE49-F238E27FC236}">
-                <a16:creationId xmlns:a16="http://schemas.microsoft.com/office/drawing/2014/main" id="{43157431-8DA7-4C82-A8F9-A69747CA7F43}"/>
+                <a16:creationId xmlns:a16="http://schemas.microsoft.com/office/drawing/2014/main" id="{9C744AC1-C3CD-46AD-9B25-6791782D833A}"/>
               </a:ext>
             </a:extLst>
           </p:cNvPr>
@@ -12309,7 +12317,7 @@
           <p:cNvPr id="11" name="">
             <a:extLst xmlns:a="http://schemas.openxmlformats.org/drawingml/2006/main">
               <a:ext uri="{FF2B5EF4-FFF2-40B4-BE49-F238E27FC236}">
-                <a16:creationId xmlns:a16="http://schemas.microsoft.com/office/drawing/2014/main" id="{2091C517-1768-46B2-8514-A44C89AC60D8}"/>
+                <a16:creationId xmlns:a16="http://schemas.microsoft.com/office/drawing/2014/main" id="{546408FE-16CE-419F-99D5-65A38EDA25B7}"/>
               </a:ext>
             </a:extLst>
           </p:cNvPr>
@@ -12341,7 +12349,7 @@
           <p:cNvPr id="12" name="">
             <a:extLst xmlns:a="http://schemas.openxmlformats.org/drawingml/2006/main">
               <a:ext uri="{FF2B5EF4-FFF2-40B4-BE49-F238E27FC236}">
-                <a16:creationId xmlns:a16="http://schemas.microsoft.com/office/drawing/2014/main" id="{D70F80F5-4AB2-432E-92FA-5FC3CD11D781}"/>
+                <a16:creationId xmlns:a16="http://schemas.microsoft.com/office/drawing/2014/main" id="{C56C6D95-6866-488E-B365-F5334766DA3C}"/>
               </a:ext>
             </a:extLst>
           </p:cNvPr>
@@ -12398,7 +12406,7 @@
           <p:cNvPr id="13" name="">
             <a:extLst xmlns:a="http://schemas.openxmlformats.org/drawingml/2006/main">
               <a:ext uri="{FF2B5EF4-FFF2-40B4-BE49-F238E27FC236}">
-                <a16:creationId xmlns:a16="http://schemas.microsoft.com/office/drawing/2014/main" id="{3B9110A6-46D8-46D7-A4E4-A51C9FA6DDC6}"/>
+                <a16:creationId xmlns:a16="http://schemas.microsoft.com/office/drawing/2014/main" id="{54AB768C-E11E-43E2-A638-57DACC49961D}"/>
               </a:ext>
             </a:extLst>
           </p:cNvPr>
@@ -12455,7 +12463,7 @@
           <p:cNvPr id="14" name="">
             <a:extLst xmlns:a="http://schemas.openxmlformats.org/drawingml/2006/main">
               <a:ext uri="{FF2B5EF4-FFF2-40B4-BE49-F238E27FC236}">
-                <a16:creationId xmlns:a16="http://schemas.microsoft.com/office/drawing/2014/main" id="{E000CA9C-8F3E-48D2-9646-16A2F9FDA0EC}"/>
+                <a16:creationId xmlns:a16="http://schemas.microsoft.com/office/drawing/2014/main" id="{E45DAAA2-CFAB-4C81-A5EA-1FB0425CD48B}"/>
               </a:ext>
             </a:extLst>
           </p:cNvPr>
@@ -12489,7 +12497,7 @@
           <p:cNvPr id="15" name="">
             <a:extLst xmlns:a="http://schemas.openxmlformats.org/drawingml/2006/main">
               <a:ext uri="{FF2B5EF4-FFF2-40B4-BE49-F238E27FC236}">
-                <a16:creationId xmlns:a16="http://schemas.microsoft.com/office/drawing/2014/main" id="{E61DF357-EC80-4F27-A280-F1327BAB32D7}"/>
+                <a16:creationId xmlns:a16="http://schemas.microsoft.com/office/drawing/2014/main" id="{F7FA7A2C-9890-431B-8918-8F38AA2571CA}"/>
               </a:ext>
             </a:extLst>
           </p:cNvPr>
@@ -12521,7 +12529,7 @@
           <p:cNvPr id="16" name="">
             <a:extLst xmlns:a="http://schemas.openxmlformats.org/drawingml/2006/main">
               <a:ext uri="{FF2B5EF4-FFF2-40B4-BE49-F238E27FC236}">
-                <a16:creationId xmlns:a16="http://schemas.microsoft.com/office/drawing/2014/main" id="{EF68A1BE-FA11-4D7B-BE2A-A98D0C1D9D8D}"/>
+                <a16:creationId xmlns:a16="http://schemas.microsoft.com/office/drawing/2014/main" id="{E0379971-B9A6-4D61-A520-40E318578D00}"/>
               </a:ext>
             </a:extLst>
           </p:cNvPr>
@@ -12578,7 +12586,7 @@
           <p:cNvPr id="17" name="">
             <a:extLst xmlns:a="http://schemas.openxmlformats.org/drawingml/2006/main">
               <a:ext uri="{FF2B5EF4-FFF2-40B4-BE49-F238E27FC236}">
-                <a16:creationId xmlns:a16="http://schemas.microsoft.com/office/drawing/2014/main" id="{8FCC296F-76AA-4B7E-B88B-0B3035734E09}"/>
+                <a16:creationId xmlns:a16="http://schemas.microsoft.com/office/drawing/2014/main" id="{267BA86A-DE6C-458F-9533-428B7074480A}"/>
               </a:ext>
             </a:extLst>
           </p:cNvPr>
@@ -12635,7 +12643,7 @@
           <p:cNvPr id="18" name="">
             <a:extLst xmlns:a="http://schemas.openxmlformats.org/drawingml/2006/main">
               <a:ext uri="{FF2B5EF4-FFF2-40B4-BE49-F238E27FC236}">
-                <a16:creationId xmlns:a16="http://schemas.microsoft.com/office/drawing/2014/main" id="{F10D20DB-0BFB-4F4D-81C5-961E70858E67}"/>
+                <a16:creationId xmlns:a16="http://schemas.microsoft.com/office/drawing/2014/main" id="{0E8B9D0E-531E-4A2A-A00F-A0A37E6C550A}"/>
               </a:ext>
             </a:extLst>
           </p:cNvPr>
@@ -12669,7 +12677,7 @@
           <p:cNvPr id="19" name="">
             <a:extLst xmlns:a="http://schemas.openxmlformats.org/drawingml/2006/main">
               <a:ext uri="{FF2B5EF4-FFF2-40B4-BE49-F238E27FC236}">
-                <a16:creationId xmlns:a16="http://schemas.microsoft.com/office/drawing/2014/main" id="{A102A3D6-3579-4132-81CD-E274607DCF12}"/>
+                <a16:creationId xmlns:a16="http://schemas.microsoft.com/office/drawing/2014/main" id="{16F567C5-AC0F-4F78-9264-93CEF69FE744}"/>
               </a:ext>
             </a:extLst>
           </p:cNvPr>
@@ -12701,7 +12709,7 @@
           <p:cNvPr id="20" name="">
             <a:extLst xmlns:a="http://schemas.openxmlformats.org/drawingml/2006/main">
               <a:ext uri="{FF2B5EF4-FFF2-40B4-BE49-F238E27FC236}">
-                <a16:creationId xmlns:a16="http://schemas.microsoft.com/office/drawing/2014/main" id="{2359BC89-362A-490C-8135-F13487316490}"/>
+                <a16:creationId xmlns:a16="http://schemas.microsoft.com/office/drawing/2014/main" id="{8AD020BC-86F9-4E53-BBFA-9A64875865C2}"/>
               </a:ext>
             </a:extLst>
           </p:cNvPr>
@@ -12758,7 +12766,7 @@
           <p:cNvPr id="21" name="">
             <a:extLst xmlns:a="http://schemas.openxmlformats.org/drawingml/2006/main">
               <a:ext uri="{FF2B5EF4-FFF2-40B4-BE49-F238E27FC236}">
-                <a16:creationId xmlns:a16="http://schemas.microsoft.com/office/drawing/2014/main" id="{A179FD76-DA16-4663-A4CB-A991D2991896}"/>
+                <a16:creationId xmlns:a16="http://schemas.microsoft.com/office/drawing/2014/main" id="{AE878289-4105-415C-ACF8-03E6102717E9}"/>
               </a:ext>
             </a:extLst>
           </p:cNvPr>
@@ -12815,7 +12823,7 @@
           <p:cNvPr id="22" name="">
             <a:extLst xmlns:a="http://schemas.openxmlformats.org/drawingml/2006/main">
               <a:ext uri="{FF2B5EF4-FFF2-40B4-BE49-F238E27FC236}">
-                <a16:creationId xmlns:a16="http://schemas.microsoft.com/office/drawing/2014/main" id="{809A08D3-3758-4732-9A97-0583E5FA276C}"/>
+                <a16:creationId xmlns:a16="http://schemas.microsoft.com/office/drawing/2014/main" id="{D8CD0079-72AA-4C67-A6D2-1AD3CA8E275D}"/>
               </a:ext>
             </a:extLst>
           </p:cNvPr>
@@ -12870,7 +12878,7 @@
     </p:spTree>
     <p:extLst>
       <p:ext uri="{BB962C8B-B14F-4D97-AF65-F5344CB8AC3E}">
-        <p14:creationId xmlns:p14="http://schemas.microsoft.com/office/powerpoint/2010/main" val="776816734"/>
+        <p14:creationId xmlns:p14="http://schemas.microsoft.com/office/powerpoint/2010/main" val="17812722"/>
       </p:ext>
     </p:extLst>
   </p:cSld>
@@ -13071,7 +13079,7 @@
           <p:cNvPr id="22" name="">
             <a:extLst xmlns:a="http://schemas.openxmlformats.org/drawingml/2006/main">
               <a:ext uri="{FF2B5EF4-FFF2-40B4-BE49-F238E27FC236}">
-                <a16:creationId xmlns:a16="http://schemas.microsoft.com/office/drawing/2014/main" id="{F7B16BA3-8C4D-4929-949A-ABCD19CF2EFA}"/>
+                <a16:creationId xmlns:a16="http://schemas.microsoft.com/office/drawing/2014/main" id="{A07C285F-928D-479D-B304-38B00A07A255}"/>
               </a:ext>
             </a:extLst>
           </p:cNvPr>
@@ -13103,7 +13111,7 @@
           <p:cNvPr id="2" name="">
             <a:extLst xmlns:a="http://schemas.openxmlformats.org/drawingml/2006/main">
               <a:ext uri="{FF2B5EF4-FFF2-40B4-BE49-F238E27FC236}">
-                <a16:creationId xmlns:a16="http://schemas.microsoft.com/office/drawing/2014/main" id="{EA80DE41-E340-4070-A055-95245AA38EDD}"/>
+                <a16:creationId xmlns:a16="http://schemas.microsoft.com/office/drawing/2014/main" id="{F3065977-2DC6-4D06-87ED-6F5767AF7525}"/>
               </a:ext>
             </a:extLst>
           </p:cNvPr>
@@ -13160,7 +13168,7 @@
           <p:cNvPr id="3" name="">
             <a:extLst xmlns:a="http://schemas.openxmlformats.org/drawingml/2006/main">
               <a:ext uri="{FF2B5EF4-FFF2-40B4-BE49-F238E27FC236}">
-                <a16:creationId xmlns:a16="http://schemas.microsoft.com/office/drawing/2014/main" id="{E2A0E074-9AE0-4B71-A3C2-5B5A17C03E1E}"/>
+                <a16:creationId xmlns:a16="http://schemas.microsoft.com/office/drawing/2014/main" id="{88306F24-8203-4E9E-AE0C-F0206BBD1D6A}"/>
               </a:ext>
             </a:extLst>
           </p:cNvPr>
@@ -13192,7 +13200,7 @@
           <p:cNvPr id="4" name="">
             <a:extLst xmlns:a="http://schemas.openxmlformats.org/drawingml/2006/main">
               <a:ext uri="{FF2B5EF4-FFF2-40B4-BE49-F238E27FC236}">
-                <a16:creationId xmlns:a16="http://schemas.microsoft.com/office/drawing/2014/main" id="{0B2768B5-2CCD-484F-AF7E-2235E03D63CE}"/>
+                <a16:creationId xmlns:a16="http://schemas.microsoft.com/office/drawing/2014/main" id="{B58B3FD6-34BC-4474-A62D-F7D9835C77E3}"/>
               </a:ext>
             </a:extLst>
           </p:cNvPr>
@@ -13249,7 +13257,7 @@
           <p:cNvPr id="5" name="">
             <a:extLst xmlns:a="http://schemas.openxmlformats.org/drawingml/2006/main">
               <a:ext uri="{FF2B5EF4-FFF2-40B4-BE49-F238E27FC236}">
-                <a16:creationId xmlns:a16="http://schemas.microsoft.com/office/drawing/2014/main" id="{79AAD874-0435-4CD2-9BB6-A1340442D34A}"/>
+                <a16:creationId xmlns:a16="http://schemas.microsoft.com/office/drawing/2014/main" id="{4808DCD1-9332-45E7-AFBD-99BE911DECBF}"/>
               </a:ext>
             </a:extLst>
           </p:cNvPr>
@@ -13306,7 +13314,7 @@
           <p:cNvPr id="6" name="">
             <a:extLst xmlns:a="http://schemas.openxmlformats.org/drawingml/2006/main">
               <a:ext uri="{FF2B5EF4-FFF2-40B4-BE49-F238E27FC236}">
-                <a16:creationId xmlns:a16="http://schemas.microsoft.com/office/drawing/2014/main" id="{F494E638-35BD-41C4-A89E-36AA2562C58E}"/>
+                <a16:creationId xmlns:a16="http://schemas.microsoft.com/office/drawing/2014/main" id="{30EC8208-12AD-4918-96E5-8EBBCE813C51}"/>
               </a:ext>
             </a:extLst>
           </p:cNvPr>
@@ -13363,7 +13371,7 @@
           <p:cNvPr id="7" name="">
             <a:extLst xmlns:a="http://schemas.openxmlformats.org/drawingml/2006/main">
               <a:ext uri="{FF2B5EF4-FFF2-40B4-BE49-F238E27FC236}">
-                <a16:creationId xmlns:a16="http://schemas.microsoft.com/office/drawing/2014/main" id="{3EB7EF0C-48FB-4067-B8FA-CBBFD8341438}"/>
+                <a16:creationId xmlns:a16="http://schemas.microsoft.com/office/drawing/2014/main" id="{7A2ABD5B-441E-40E2-AFF2-4B710F4A1A47}"/>
               </a:ext>
             </a:extLst>
           </p:cNvPr>
@@ -13395,7 +13403,7 @@
           <p:cNvPr id="8" name="">
             <a:extLst xmlns:a="http://schemas.openxmlformats.org/drawingml/2006/main">
               <a:ext uri="{FF2B5EF4-FFF2-40B4-BE49-F238E27FC236}">
-                <a16:creationId xmlns:a16="http://schemas.microsoft.com/office/drawing/2014/main" id="{AEFA1DD0-1989-40F7-899A-CB94939B4DEC}"/>
+                <a16:creationId xmlns:a16="http://schemas.microsoft.com/office/drawing/2014/main" id="{DE870872-9000-46B3-88E6-CC2EA4081711}"/>
               </a:ext>
             </a:extLst>
           </p:cNvPr>
@@ -13452,7 +13460,7 @@
           <p:cNvPr id="9" name="">
             <a:extLst xmlns:a="http://schemas.openxmlformats.org/drawingml/2006/main">
               <a:ext uri="{FF2B5EF4-FFF2-40B4-BE49-F238E27FC236}">
-                <a16:creationId xmlns:a16="http://schemas.microsoft.com/office/drawing/2014/main" id="{9ABE382A-7088-4BED-BE29-3F491357F81E}"/>
+                <a16:creationId xmlns:a16="http://schemas.microsoft.com/office/drawing/2014/main" id="{08A2D61E-C2F8-447F-8790-8B7B8B51A5B6}"/>
               </a:ext>
             </a:extLst>
           </p:cNvPr>
@@ -13509,7 +13517,7 @@
           <p:cNvPr id="10" name="">
             <a:extLst xmlns:a="http://schemas.openxmlformats.org/drawingml/2006/main">
               <a:ext uri="{FF2B5EF4-FFF2-40B4-BE49-F238E27FC236}">
-                <a16:creationId xmlns:a16="http://schemas.microsoft.com/office/drawing/2014/main" id="{CDF4B5F7-09AE-45A2-89B6-8CF161F22780}"/>
+                <a16:creationId xmlns:a16="http://schemas.microsoft.com/office/drawing/2014/main" id="{9D346646-330E-4178-9A2F-0D426A2552C0}"/>
               </a:ext>
             </a:extLst>
           </p:cNvPr>
@@ -13543,7 +13551,7 @@
           <p:cNvPr id="11" name="">
             <a:extLst xmlns:a="http://schemas.openxmlformats.org/drawingml/2006/main">
               <a:ext uri="{FF2B5EF4-FFF2-40B4-BE49-F238E27FC236}">
-                <a16:creationId xmlns:a16="http://schemas.microsoft.com/office/drawing/2014/main" id="{C9453991-D4AE-481D-A2F8-C741B9307D64}"/>
+                <a16:creationId xmlns:a16="http://schemas.microsoft.com/office/drawing/2014/main" id="{0A51EE31-117D-4B24-9AC7-7A818B7EF9F8}"/>
               </a:ext>
             </a:extLst>
           </p:cNvPr>
@@ -13575,7 +13583,7 @@
           <p:cNvPr id="12" name="">
             <a:extLst xmlns:a="http://schemas.openxmlformats.org/drawingml/2006/main">
               <a:ext uri="{FF2B5EF4-FFF2-40B4-BE49-F238E27FC236}">
-                <a16:creationId xmlns:a16="http://schemas.microsoft.com/office/drawing/2014/main" id="{56711D03-B038-4636-AAC2-554B425EEB01}"/>
+                <a16:creationId xmlns:a16="http://schemas.microsoft.com/office/drawing/2014/main" id="{18402623-DDBF-46E3-8CCC-3DDE99DF44EC}"/>
               </a:ext>
             </a:extLst>
           </p:cNvPr>
@@ -13632,7 +13640,7 @@
           <p:cNvPr id="13" name="">
             <a:extLst xmlns:a="http://schemas.openxmlformats.org/drawingml/2006/main">
               <a:ext uri="{FF2B5EF4-FFF2-40B4-BE49-F238E27FC236}">
-                <a16:creationId xmlns:a16="http://schemas.microsoft.com/office/drawing/2014/main" id="{D8F257E0-51F5-4585-A263-9CF39272104C}"/>
+                <a16:creationId xmlns:a16="http://schemas.microsoft.com/office/drawing/2014/main" id="{0FCB9C99-2013-43C2-B4E7-46BBA8AD253A}"/>
               </a:ext>
             </a:extLst>
           </p:cNvPr>
@@ -13689,7 +13697,7 @@
           <p:cNvPr id="14" name="">
             <a:extLst xmlns:a="http://schemas.openxmlformats.org/drawingml/2006/main">
               <a:ext uri="{FF2B5EF4-FFF2-40B4-BE49-F238E27FC236}">
-                <a16:creationId xmlns:a16="http://schemas.microsoft.com/office/drawing/2014/main" id="{F8579D6F-63E6-4C5B-80E7-3C6DF88F5154}"/>
+                <a16:creationId xmlns:a16="http://schemas.microsoft.com/office/drawing/2014/main" id="{901CCE3E-05F7-41C7-A598-C562C6F5302F}"/>
               </a:ext>
             </a:extLst>
           </p:cNvPr>
@@ -13723,7 +13731,7 @@
           <p:cNvPr id="15" name="">
             <a:extLst xmlns:a="http://schemas.openxmlformats.org/drawingml/2006/main">
               <a:ext uri="{FF2B5EF4-FFF2-40B4-BE49-F238E27FC236}">
-                <a16:creationId xmlns:a16="http://schemas.microsoft.com/office/drawing/2014/main" id="{30DA2B5C-9E97-4AD9-A3E2-03EDBD24B549}"/>
+                <a16:creationId xmlns:a16="http://schemas.microsoft.com/office/drawing/2014/main" id="{DEB704F9-D7B4-41A1-BDA9-3F7F8FDD6F33}"/>
               </a:ext>
             </a:extLst>
           </p:cNvPr>
@@ -13755,7 +13763,7 @@
           <p:cNvPr id="16" name="">
             <a:extLst xmlns:a="http://schemas.openxmlformats.org/drawingml/2006/main">
               <a:ext uri="{FF2B5EF4-FFF2-40B4-BE49-F238E27FC236}">
-                <a16:creationId xmlns:a16="http://schemas.microsoft.com/office/drawing/2014/main" id="{E2ACA97E-D90B-4DA6-90BB-1A8F277BFEA8}"/>
+                <a16:creationId xmlns:a16="http://schemas.microsoft.com/office/drawing/2014/main" id="{C3421E15-9FB0-44C2-9CF6-B31025B1292D}"/>
               </a:ext>
             </a:extLst>
           </p:cNvPr>
@@ -13812,7 +13820,7 @@
           <p:cNvPr id="17" name="">
             <a:extLst xmlns:a="http://schemas.openxmlformats.org/drawingml/2006/main">
               <a:ext uri="{FF2B5EF4-FFF2-40B4-BE49-F238E27FC236}">
-                <a16:creationId xmlns:a16="http://schemas.microsoft.com/office/drawing/2014/main" id="{21A17DFB-7E6C-4181-99C2-C1EE0033CDD3}"/>
+                <a16:creationId xmlns:a16="http://schemas.microsoft.com/office/drawing/2014/main" id="{A6C54934-5A9F-4394-BF98-CFB129F88FF7}"/>
               </a:ext>
             </a:extLst>
           </p:cNvPr>
@@ -13869,7 +13877,7 @@
           <p:cNvPr id="18" name="">
             <a:extLst xmlns:a="http://schemas.openxmlformats.org/drawingml/2006/main">
               <a:ext uri="{FF2B5EF4-FFF2-40B4-BE49-F238E27FC236}">
-                <a16:creationId xmlns:a16="http://schemas.microsoft.com/office/drawing/2014/main" id="{B7873F70-7283-45CC-9E0B-3CA5F5CD040A}"/>
+                <a16:creationId xmlns:a16="http://schemas.microsoft.com/office/drawing/2014/main" id="{8A420C4F-282D-4B5D-8CDB-2CB0F771949F}"/>
               </a:ext>
             </a:extLst>
           </p:cNvPr>
@@ -13903,7 +13911,7 @@
           <p:cNvPr id="19" name="">
             <a:extLst xmlns:a="http://schemas.openxmlformats.org/drawingml/2006/main">
               <a:ext uri="{FF2B5EF4-FFF2-40B4-BE49-F238E27FC236}">
-                <a16:creationId xmlns:a16="http://schemas.microsoft.com/office/drawing/2014/main" id="{31243422-F345-431B-8AC8-B7E272C2BA95}"/>
+                <a16:creationId xmlns:a16="http://schemas.microsoft.com/office/drawing/2014/main" id="{A77DBDDE-83C1-41C0-AE36-3AE4DC2FEB45}"/>
               </a:ext>
             </a:extLst>
           </p:cNvPr>
@@ -13935,7 +13943,7 @@
           <p:cNvPr id="20" name="">
             <a:extLst xmlns:a="http://schemas.openxmlformats.org/drawingml/2006/main">
               <a:ext uri="{FF2B5EF4-FFF2-40B4-BE49-F238E27FC236}">
-                <a16:creationId xmlns:a16="http://schemas.microsoft.com/office/drawing/2014/main" id="{C6502800-D8D1-4353-8E31-5026FB859DB7}"/>
+                <a16:creationId xmlns:a16="http://schemas.microsoft.com/office/drawing/2014/main" id="{2E97D8FF-9BCA-49CE-B3B2-F905361DFC08}"/>
               </a:ext>
             </a:extLst>
           </p:cNvPr>
@@ -13992,7 +14000,7 @@
           <p:cNvPr id="21" name="">
             <a:extLst xmlns:a="http://schemas.openxmlformats.org/drawingml/2006/main">
               <a:ext uri="{FF2B5EF4-FFF2-40B4-BE49-F238E27FC236}">
-                <a16:creationId xmlns:a16="http://schemas.microsoft.com/office/drawing/2014/main" id="{0FAD6C7B-65F7-4C14-BD24-7D679C23453C}"/>
+                <a16:creationId xmlns:a16="http://schemas.microsoft.com/office/drawing/2014/main" id="{78C61C5B-542D-416A-A8BD-FBC1F6030874}"/>
               </a:ext>
             </a:extLst>
           </p:cNvPr>
@@ -14047,7 +14055,7 @@
     </p:spTree>
     <p:extLst>
       <p:ext uri="{BB962C8B-B14F-4D97-AF65-F5344CB8AC3E}">
-        <p14:creationId xmlns:p14="http://schemas.microsoft.com/office/powerpoint/2010/main" val="287352545"/>
+        <p14:creationId xmlns:p14="http://schemas.microsoft.com/office/powerpoint/2010/main" val="763670492"/>
       </p:ext>
     </p:extLst>
   </p:cSld>
